--- a/倒水游戏_展示PPT.pptx
+++ b/倒水游戏_展示PPT.pptx
@@ -1,22 +1,22 @@
 
 <file path=ppt/presentation.xml><?xml version="1.0" encoding="utf-8"?>
-<p:presentation xmlns:a="http://schemas.openxmlformats.org/drawingml/2006/main" xmlns:r="http://schemas.openxmlformats.org/officeDocument/2006/relationships" xmlns:p="http://schemas.openxmlformats.org/presentationml/2006/main" saveSubsetFonts="1" autoCompressPictures="0">
+<p:presentation xmlns:a="http://schemas.openxmlformats.org/drawingml/2006/main" xmlns:r="http://schemas.openxmlformats.org/officeDocument/2006/relationships" xmlns:p="http://schemas.openxmlformats.org/presentationml/2006/main" autoCompressPictures="0">
   <p:sldMasterIdLst>
     <p:sldMasterId id="2147483648" r:id="rId1"/>
   </p:sldMasterIdLst>
+  <p:notesMasterIdLst>
+    <p:notesMasterId r:id="rId4"/>
+  </p:notesMasterIdLst>
   <p:sldIdLst>
-    <p:sldId id="256" r:id="rId2"/>
-    <p:sldId id="257" r:id="rId3"/>
-    <p:sldId id="258" r:id="rId4"/>
-    <p:sldId id="259" r:id="rId5"/>
-    <p:sldId id="260" r:id="rId6"/>
-    <p:sldId id="261" r:id="rId7"/>
-    <p:sldId id="262" r:id="rId8"/>
-    <p:sldId id="263" r:id="rId9"/>
+    <p:sldId id="256" r:id="rId3"/>
+    <p:sldId id="257" r:id="rId5"/>
+    <p:sldId id="258" r:id="rId6"/>
+    <p:sldId id="259" r:id="rId7"/>
+    <p:sldId id="260" r:id="rId8"/>
+    <p:sldId id="261" r:id="rId9"/>
+    <p:sldId id="262" r:id="rId10"/>
+    <p:sldId id="263" r:id="rId11"/>
   </p:sldIdLst>
-  <p:notesMasterIdLst>
-    <p:notesMasterId r:id="rId10"/>
-  </p:notesMasterIdLst>
   <p:sldSz cx="9144000" cy="5143500"/>
   <p:notesSz cx="5143500" cy="9144000"/>
   <p:defaultTextStyle>
@@ -196,7 +196,6 @@
           <a:p>
             <a:fld id="{5282F153-3F37-0F45-9E97-73ACFA13230C}" type="datetimeFigureOut">
               <a:rPr lang="en-US"/>
-              <a:t>7/23/19</a:t>
             </a:fld>
             <a:endParaRPr lang="en-US"/>
           </a:p>
@@ -263,6 +262,7 @@
               <a:rPr lang="en-US"/>
               <a:t>Click to edit Master text styles</a:t>
             </a:r>
+            <a:endParaRPr lang="en-US"/>
           </a:p>
           <a:p>
             <a:pPr lvl="1"/>
@@ -270,6 +270,7 @@
               <a:rPr lang="en-US"/>
               <a:t>Second level</a:t>
             </a:r>
+            <a:endParaRPr lang="en-US"/>
           </a:p>
           <a:p>
             <a:pPr lvl="2"/>
@@ -277,6 +278,7 @@
               <a:rPr lang="en-US"/>
               <a:t>Third level</a:t>
             </a:r>
+            <a:endParaRPr lang="en-US"/>
           </a:p>
           <a:p>
             <a:pPr lvl="3"/>
@@ -284,6 +286,7 @@
               <a:rPr lang="en-US"/>
               <a:t>Fourth level</a:t>
             </a:r>
+            <a:endParaRPr lang="en-US"/>
           </a:p>
           <a:p>
             <a:pPr lvl="4"/>
@@ -291,6 +294,7 @@
               <a:rPr lang="en-US"/>
               <a:t>Fifth level</a:t>
             </a:r>
+            <a:endParaRPr lang="en-US"/>
           </a:p>
         </p:txBody>
       </p:sp>
@@ -354,18 +358,12 @@
           <a:p>
             <a:fld id="{CE5E9CC1-C706-0F49-92D6-E571CC5EEA8F}" type="slidenum">
               <a:rPr lang="en-US"/>
-              <a:t>‹#›</a:t>
             </a:fld>
             <a:endParaRPr lang="en-US"/>
           </a:p>
         </p:txBody>
       </p:sp>
     </p:spTree>
-    <p:extLst>
-      <p:ext uri="{BB962C8B-B14F-4D97-AF65-F5344CB8AC3E}">
-        <p14:creationId xmlns:p14="http://schemas.microsoft.com/office/powerpoint/2010/main" val="1024086991"/>
-      </p:ext>
-    </p:extLst>
   </p:cSld>
   <p:clrMap bg1="lt1" tx1="dk1" bg2="lt2" tx2="dk2" accent1="accent1" accent2="accent2" accent3="accent3" accent4="accent4" accent5="accent5" accent6="accent6" hlink="hlink" folHlink="folHlink"/>
   <p:notesStyle>
@@ -507,10 +505,6 @@
           <a:bodyPr/>
           <a:lstStyle/>
           <a:p>
-            <a:r>
-              <a:rPr lang="en-US" dirty="0"/>
-              <a:t/>
-            </a:r>
             <a:endParaRPr lang="en-US" dirty="0"/>
           </a:p>
         </p:txBody>
@@ -532,18 +526,12 @@
           <a:p>
             <a:fld id="{F7021451-1387-4CA6-816F-3879F97B5CBC}" type="slidenum">
               <a:rPr lang="en-US"/>
-              <a:t>1</a:t>
             </a:fld>
             <a:endParaRPr lang="en-US"/>
           </a:p>
         </p:txBody>
       </p:sp>
     </p:spTree>
-    <p:extLst>
-      <p:ext uri="{BB962C8B-B14F-4D97-AF65-F5344CB8AC3E}">
-        <p14:creationId xmlns:p14="http://schemas.microsoft.com/office/powerpoint/2010/main" val="1024086991"/>
-      </p:ext>
-    </p:extLst>
   </p:cSld>
   <p:clrMapOvr>
     <a:masterClrMapping/>
@@ -595,10 +583,6 @@
           <a:bodyPr/>
           <a:lstStyle/>
           <a:p>
-            <a:r>
-              <a:rPr lang="en-US" dirty="0"/>
-              <a:t/>
-            </a:r>
             <a:endParaRPr lang="en-US" dirty="0"/>
           </a:p>
         </p:txBody>
@@ -620,18 +604,12 @@
           <a:p>
             <a:fld id="{F7021451-1387-4CA6-816F-3879F97B5CBC}" type="slidenum">
               <a:rPr lang="en-US"/>
-              <a:t>2</a:t>
             </a:fld>
             <a:endParaRPr lang="en-US"/>
           </a:p>
         </p:txBody>
       </p:sp>
     </p:spTree>
-    <p:extLst>
-      <p:ext uri="{BB962C8B-B14F-4D97-AF65-F5344CB8AC3E}">
-        <p14:creationId xmlns:p14="http://schemas.microsoft.com/office/powerpoint/2010/main" val="1024086991"/>
-      </p:ext>
-    </p:extLst>
   </p:cSld>
   <p:clrMapOvr>
     <a:masterClrMapping/>
@@ -683,10 +661,6 @@
           <a:bodyPr/>
           <a:lstStyle/>
           <a:p>
-            <a:r>
-              <a:rPr lang="en-US" dirty="0"/>
-              <a:t/>
-            </a:r>
             <a:endParaRPr lang="en-US" dirty="0"/>
           </a:p>
         </p:txBody>
@@ -708,18 +682,12 @@
           <a:p>
             <a:fld id="{F7021451-1387-4CA6-816F-3879F97B5CBC}" type="slidenum">
               <a:rPr lang="en-US"/>
-              <a:t>3</a:t>
             </a:fld>
             <a:endParaRPr lang="en-US"/>
           </a:p>
         </p:txBody>
       </p:sp>
     </p:spTree>
-    <p:extLst>
-      <p:ext uri="{BB962C8B-B14F-4D97-AF65-F5344CB8AC3E}">
-        <p14:creationId xmlns:p14="http://schemas.microsoft.com/office/powerpoint/2010/main" val="1024086991"/>
-      </p:ext>
-    </p:extLst>
   </p:cSld>
   <p:clrMapOvr>
     <a:masterClrMapping/>
@@ -771,10 +739,6 @@
           <a:bodyPr/>
           <a:lstStyle/>
           <a:p>
-            <a:r>
-              <a:rPr lang="en-US" dirty="0"/>
-              <a:t/>
-            </a:r>
             <a:endParaRPr lang="en-US" dirty="0"/>
           </a:p>
         </p:txBody>
@@ -796,18 +760,12 @@
           <a:p>
             <a:fld id="{F7021451-1387-4CA6-816F-3879F97B5CBC}" type="slidenum">
               <a:rPr lang="en-US"/>
-              <a:t>4</a:t>
             </a:fld>
             <a:endParaRPr lang="en-US"/>
           </a:p>
         </p:txBody>
       </p:sp>
     </p:spTree>
-    <p:extLst>
-      <p:ext uri="{BB962C8B-B14F-4D97-AF65-F5344CB8AC3E}">
-        <p14:creationId xmlns:p14="http://schemas.microsoft.com/office/powerpoint/2010/main" val="1024086991"/>
-      </p:ext>
-    </p:extLst>
   </p:cSld>
   <p:clrMapOvr>
     <a:masterClrMapping/>
@@ -859,10 +817,6 @@
           <a:bodyPr/>
           <a:lstStyle/>
           <a:p>
-            <a:r>
-              <a:rPr lang="en-US" dirty="0"/>
-              <a:t/>
-            </a:r>
             <a:endParaRPr lang="en-US" dirty="0"/>
           </a:p>
         </p:txBody>
@@ -884,18 +838,12 @@
           <a:p>
             <a:fld id="{F7021451-1387-4CA6-816F-3879F97B5CBC}" type="slidenum">
               <a:rPr lang="en-US"/>
-              <a:t>5</a:t>
             </a:fld>
             <a:endParaRPr lang="en-US"/>
           </a:p>
         </p:txBody>
       </p:sp>
     </p:spTree>
-    <p:extLst>
-      <p:ext uri="{BB962C8B-B14F-4D97-AF65-F5344CB8AC3E}">
-        <p14:creationId xmlns:p14="http://schemas.microsoft.com/office/powerpoint/2010/main" val="1024086991"/>
-      </p:ext>
-    </p:extLst>
   </p:cSld>
   <p:clrMapOvr>
     <a:masterClrMapping/>
@@ -947,10 +895,6 @@
           <a:bodyPr/>
           <a:lstStyle/>
           <a:p>
-            <a:r>
-              <a:rPr lang="en-US" dirty="0"/>
-              <a:t/>
-            </a:r>
             <a:endParaRPr lang="en-US" dirty="0"/>
           </a:p>
         </p:txBody>
@@ -972,18 +916,12 @@
           <a:p>
             <a:fld id="{F7021451-1387-4CA6-816F-3879F97B5CBC}" type="slidenum">
               <a:rPr lang="en-US"/>
-              <a:t>6</a:t>
             </a:fld>
             <a:endParaRPr lang="en-US"/>
           </a:p>
         </p:txBody>
       </p:sp>
     </p:spTree>
-    <p:extLst>
-      <p:ext uri="{BB962C8B-B14F-4D97-AF65-F5344CB8AC3E}">
-        <p14:creationId xmlns:p14="http://schemas.microsoft.com/office/powerpoint/2010/main" val="1024086991"/>
-      </p:ext>
-    </p:extLst>
   </p:cSld>
   <p:clrMapOvr>
     <a:masterClrMapping/>
@@ -1035,10 +973,6 @@
           <a:bodyPr/>
           <a:lstStyle/>
           <a:p>
-            <a:r>
-              <a:rPr lang="en-US" dirty="0"/>
-              <a:t/>
-            </a:r>
             <a:endParaRPr lang="en-US" dirty="0"/>
           </a:p>
         </p:txBody>
@@ -1060,18 +994,12 @@
           <a:p>
             <a:fld id="{F7021451-1387-4CA6-816F-3879F97B5CBC}" type="slidenum">
               <a:rPr lang="en-US"/>
-              <a:t>7</a:t>
             </a:fld>
             <a:endParaRPr lang="en-US"/>
           </a:p>
         </p:txBody>
       </p:sp>
     </p:spTree>
-    <p:extLst>
-      <p:ext uri="{BB962C8B-B14F-4D97-AF65-F5344CB8AC3E}">
-        <p14:creationId xmlns:p14="http://schemas.microsoft.com/office/powerpoint/2010/main" val="1024086991"/>
-      </p:ext>
-    </p:extLst>
   </p:cSld>
   <p:clrMapOvr>
     <a:masterClrMapping/>
@@ -1123,10 +1051,6 @@
           <a:bodyPr/>
           <a:lstStyle/>
           <a:p>
-            <a:r>
-              <a:rPr lang="en-US" dirty="0"/>
-              <a:t/>
-            </a:r>
             <a:endParaRPr lang="en-US" dirty="0"/>
           </a:p>
         </p:txBody>
@@ -1148,18 +1072,12 @@
           <a:p>
             <a:fld id="{F7021451-1387-4CA6-816F-3879F97B5CBC}" type="slidenum">
               <a:rPr lang="en-US"/>
-              <a:t>8</a:t>
             </a:fld>
             <a:endParaRPr lang="en-US"/>
           </a:p>
         </p:txBody>
       </p:sp>
     </p:spTree>
-    <p:extLst>
-      <p:ext uri="{BB962C8B-B14F-4D97-AF65-F5344CB8AC3E}">
-        <p14:creationId xmlns:p14="http://schemas.microsoft.com/office/powerpoint/2010/main" val="1024086991"/>
-      </p:ext>
-    </p:extLst>
   </p:cSld>
   <p:clrMapOvr>
     <a:masterClrMapping/>
@@ -1200,6 +1118,11 @@
 <file path=ppt/slideMasters/slideMaster1.xml><?xml version="1.0" encoding="utf-8"?>
 <p:sldMaster xmlns:a="http://schemas.openxmlformats.org/drawingml/2006/main" xmlns:r="http://schemas.openxmlformats.org/officeDocument/2006/relationships" xmlns:p="http://schemas.openxmlformats.org/presentationml/2006/main">
   <p:cSld>
+    <p:bg>
+      <p:bgRef idx="1001">
+        <a:schemeClr val="bg1"/>
+      </p:bgRef>
+    </p:bg>
     <p:spTree>
       <p:nvGrpSpPr>
         <p:cNvPr id="1" name=""/>
@@ -1243,7 +1166,7 @@
         <a:spcBef>
           <a:spcPct val="20000"/>
         </a:spcBef>
-        <a:buFont typeface="Arial" pitchFamily="34" charset="0"/>
+        <a:buFont typeface="Arial" panose="020B0604020202020204" pitchFamily="34" charset="0"/>
         <a:buChar char="•"/>
         <a:defRPr sz="3200" kern="1200">
           <a:solidFill>
@@ -1258,7 +1181,7 @@
         <a:spcBef>
           <a:spcPct val="20000"/>
         </a:spcBef>
-        <a:buFont typeface="Arial" pitchFamily="34" charset="0"/>
+        <a:buFont typeface="Arial" panose="020B0604020202020204" pitchFamily="34" charset="0"/>
         <a:buChar char="–"/>
         <a:defRPr sz="2800" kern="1200">
           <a:solidFill>
@@ -1273,7 +1196,7 @@
         <a:spcBef>
           <a:spcPct val="20000"/>
         </a:spcBef>
-        <a:buFont typeface="Arial" pitchFamily="34" charset="0"/>
+        <a:buFont typeface="Arial" panose="020B0604020202020204" pitchFamily="34" charset="0"/>
         <a:buChar char="•"/>
         <a:defRPr sz="2400" kern="1200">
           <a:solidFill>
@@ -1288,7 +1211,7 @@
         <a:spcBef>
           <a:spcPct val="20000"/>
         </a:spcBef>
-        <a:buFont typeface="Arial" pitchFamily="34" charset="0"/>
+        <a:buFont typeface="Arial" panose="020B0604020202020204" pitchFamily="34" charset="0"/>
         <a:buChar char="–"/>
         <a:defRPr sz="2000" kern="1200">
           <a:solidFill>
@@ -1303,7 +1226,7 @@
         <a:spcBef>
           <a:spcPct val="20000"/>
         </a:spcBef>
-        <a:buFont typeface="Arial" pitchFamily="34" charset="0"/>
+        <a:buFont typeface="Arial" panose="020B0604020202020204" pitchFamily="34" charset="0"/>
         <a:buChar char="»"/>
         <a:defRPr sz="2000" kern="1200">
           <a:solidFill>
@@ -1318,7 +1241,7 @@
         <a:spcBef>
           <a:spcPct val="20000"/>
         </a:spcBef>
-        <a:buFont typeface="Arial" pitchFamily="34" charset="0"/>
+        <a:buFont typeface="Arial" panose="020B0604020202020204" pitchFamily="34" charset="0"/>
         <a:buChar char="•"/>
         <a:defRPr sz="2000" kern="1200">
           <a:solidFill>
@@ -1333,7 +1256,7 @@
         <a:spcBef>
           <a:spcPct val="20000"/>
         </a:spcBef>
-        <a:buFont typeface="Arial" pitchFamily="34" charset="0"/>
+        <a:buFont typeface="Arial" panose="020B0604020202020204" pitchFamily="34" charset="0"/>
         <a:buChar char="•"/>
         <a:defRPr sz="2000" kern="1200">
           <a:solidFill>
@@ -1348,7 +1271,7 @@
         <a:spcBef>
           <a:spcPct val="20000"/>
         </a:spcBef>
-        <a:buFont typeface="Arial" pitchFamily="34" charset="0"/>
+        <a:buFont typeface="Arial" panose="020B0604020202020204" pitchFamily="34" charset="0"/>
         <a:buChar char="•"/>
         <a:defRPr sz="2000" kern="1200">
           <a:solidFill>
@@ -1363,7 +1286,7 @@
         <a:spcBef>
           <a:spcPct val="20000"/>
         </a:spcBef>
-        <a:buFont typeface="Arial" pitchFamily="34" charset="0"/>
+        <a:buFont typeface="Arial" panose="020B0604020202020204" pitchFamily="34" charset="0"/>
         <a:buChar char="•"/>
         <a:defRPr sz="2000" kern="1200">
           <a:solidFill>
@@ -1476,12 +1399,13 @@
 
 <file path=ppt/slides/slide1.xml><?xml version="1.0" encoding="utf-8"?>
 <p:sld xmlns:a="http://schemas.openxmlformats.org/drawingml/2006/main" xmlns:r="http://schemas.openxmlformats.org/officeDocument/2006/relationships" xmlns:p="http://schemas.openxmlformats.org/presentationml/2006/main">
-  <p:cSld name="Slide 1">
+  <p:cSld>
     <p:bg>
       <p:bgPr>
         <a:solidFill>
           <a:srgbClr val="2B2B2B"/>
         </a:solidFill>
+        <a:effectLst/>
       </p:bgPr>
     </p:bg>
     <p:spTree>
@@ -1513,13 +1437,12 @@
             <a:avLst/>
           </a:prstGeom>
           <a:noFill/>
-          <a:ln/>
-        </p:spPr>
-        <p:txBody>
-          <a:bodyPr wrap="square" rtlCol="0" anchor="ctr"/>
-          <a:lstStyle/>
-          <a:p>
-            <a:pPr algn="ctr" indent="0" marL="0">
+        </p:spPr>
+        <p:txBody>
+          <a:bodyPr wrap="square" rtlCol="0" anchor="ctr"/>
+          <a:lstStyle/>
+          <a:p>
+            <a:pPr marL="0" indent="0" algn="ctr">
               <a:buNone/>
             </a:pPr>
             <a:r>
@@ -1549,13 +1472,12 @@
             <a:avLst/>
           </a:prstGeom>
           <a:noFill/>
-          <a:ln/>
-        </p:spPr>
-        <p:txBody>
-          <a:bodyPr wrap="square" rtlCol="0" anchor="ctr"/>
-          <a:lstStyle/>
-          <a:p>
-            <a:pPr algn="ctr" indent="0" marL="0">
+        </p:spPr>
+        <p:txBody>
+          <a:bodyPr wrap="square" rtlCol="0" anchor="ctr"/>
+          <a:lstStyle/>
+          <a:p>
+            <a:pPr marL="0" indent="0" algn="ctr">
               <a:buNone/>
             </a:pPr>
             <a:r>
@@ -1563,9 +1485,9 @@
                 <a:solidFill>
                   <a:srgbClr val="FFFFFF"/>
                 </a:solidFill>
-                <a:latin typeface="Arial" pitchFamily="34" charset="0"/>
-                <a:ea typeface="Arial" pitchFamily="34" charset="-122"/>
-                <a:cs typeface="Arial" pitchFamily="34" charset="-120"/>
+                <a:latin typeface="Arial" panose="020B0604020202020204" pitchFamily="34" charset="0"/>
+                <a:ea typeface="Arial" panose="020B0604020202020204" pitchFamily="34" charset="-122"/>
+                <a:cs typeface="Arial" panose="020B0604020202020204" pitchFamily="34" charset="-120"/>
               </a:rPr>
               <a:t>倒水游戏</a:t>
             </a:r>
@@ -1588,13 +1510,12 @@
             <a:avLst/>
           </a:prstGeom>
           <a:noFill/>
-          <a:ln/>
-        </p:spPr>
-        <p:txBody>
-          <a:bodyPr wrap="square" rtlCol="0" anchor="ctr"/>
-          <a:lstStyle/>
-          <a:p>
-            <a:pPr algn="ctr" indent="0" marL="0">
+        </p:spPr>
+        <p:txBody>
+          <a:bodyPr wrap="square" rtlCol="0" anchor="ctr"/>
+          <a:lstStyle/>
+          <a:p>
+            <a:pPr marL="0" indent="0" algn="ctr">
               <a:buNone/>
             </a:pPr>
             <a:r>
@@ -1602,9 +1523,9 @@
                 <a:solidFill>
                   <a:srgbClr val="D4A853"/>
                 </a:solidFill>
-                <a:latin typeface="Arial" pitchFamily="34" charset="0"/>
-                <a:ea typeface="Arial" pitchFamily="34" charset="-122"/>
-                <a:cs typeface="Arial" pitchFamily="34" charset="-120"/>
+                <a:latin typeface="Arial" panose="020B0604020202020204" pitchFamily="34" charset="0"/>
+                <a:ea typeface="Arial" panose="020B0604020202020204" pitchFamily="34" charset="-122"/>
+                <a:cs typeface="Arial" panose="020B0604020202020204" pitchFamily="34" charset="-120"/>
               </a:rPr>
               <a:t>Water Sort Puzzle</a:t>
             </a:r>
@@ -1627,13 +1548,12 @@
             <a:avLst/>
           </a:prstGeom>
           <a:noFill/>
-          <a:ln/>
-        </p:spPr>
-        <p:txBody>
-          <a:bodyPr wrap="square" rtlCol="0" anchor="ctr"/>
-          <a:lstStyle/>
-          <a:p>
-            <a:pPr algn="ctr" indent="0" marL="0">
+        </p:spPr>
+        <p:txBody>
+          <a:bodyPr wrap="square" rtlCol="0" anchor="ctr"/>
+          <a:lstStyle/>
+          <a:p>
+            <a:pPr marL="0" indent="0" algn="ctr">
               <a:buNone/>
             </a:pPr>
             <a:r>
@@ -1663,13 +1583,12 @@
             <a:avLst/>
           </a:prstGeom>
           <a:noFill/>
-          <a:ln/>
-        </p:spPr>
-        <p:txBody>
-          <a:bodyPr wrap="square" rtlCol="0" anchor="ctr"/>
-          <a:lstStyle/>
-          <a:p>
-            <a:pPr algn="ctr" indent="0" marL="0">
+        </p:spPr>
+        <p:txBody>
+          <a:bodyPr wrap="square" rtlCol="0" anchor="ctr"/>
+          <a:lstStyle/>
+          <a:p>
+            <a:pPr marL="0" indent="0" algn="ctr">
               <a:buNone/>
             </a:pPr>
             <a:r>
@@ -1694,12 +1613,13 @@
 
 <file path=ppt/slides/slide2.xml><?xml version="1.0" encoding="utf-8"?>
 <p:sld xmlns:a="http://schemas.openxmlformats.org/drawingml/2006/main" xmlns:r="http://schemas.openxmlformats.org/officeDocument/2006/relationships" xmlns:p="http://schemas.openxmlformats.org/presentationml/2006/main">
-  <p:cSld name="Slide 2">
+  <p:cSld>
     <p:bg>
       <p:bgPr>
         <a:solidFill>
           <a:srgbClr val="F7F5F0"/>
         </a:solidFill>
+        <a:effectLst/>
       </p:bgPr>
     </p:bg>
     <p:spTree>
@@ -1733,7 +1653,6 @@
           <a:solidFill>
             <a:srgbClr val="D4A853"/>
           </a:solidFill>
-          <a:ln/>
         </p:spPr>
       </p:sp>
       <p:sp>
@@ -1751,13 +1670,12 @@
             <a:avLst/>
           </a:prstGeom>
           <a:noFill/>
-          <a:ln/>
-        </p:spPr>
-        <p:txBody>
-          <a:bodyPr wrap="square" rtlCol="0" anchor="ctr"/>
-          <a:lstStyle/>
-          <a:p>
-            <a:pPr indent="0" marL="0">
+        </p:spPr>
+        <p:txBody>
+          <a:bodyPr wrap="square" rtlCol="0" anchor="ctr"/>
+          <a:lstStyle/>
+          <a:p>
+            <a:pPr marL="0" indent="0">
               <a:buNone/>
             </a:pPr>
             <a:r>
@@ -1765,9 +1683,9 @@
                 <a:solidFill>
                   <a:srgbClr val="2B2B2B"/>
                 </a:solidFill>
-                <a:latin typeface="Arial" pitchFamily="34" charset="0"/>
-                <a:ea typeface="Arial" pitchFamily="34" charset="-122"/>
-                <a:cs typeface="Arial" pitchFamily="34" charset="-120"/>
+                <a:latin typeface="Arial" panose="020B0604020202020204" pitchFamily="34" charset="0"/>
+                <a:ea typeface="Arial" panose="020B0604020202020204" pitchFamily="34" charset="-122"/>
+                <a:cs typeface="Arial" panose="020B0604020202020204" pitchFamily="34" charset="-120"/>
               </a:rPr>
               <a:t>游戏概述</a:t>
             </a:r>
@@ -1790,13 +1708,12 @@
             <a:avLst/>
           </a:prstGeom>
           <a:noFill/>
-          <a:ln/>
         </p:spPr>
         <p:txBody>
           <a:bodyPr wrap="square" rtlCol="0" anchor="t"/>
           <a:lstStyle/>
           <a:p>
-            <a:pPr indent="0" marL="0">
+            <a:pPr marL="0" indent="0">
               <a:buNone/>
             </a:pPr>
             <a:r>
@@ -1804,22 +1721,22 @@
                 <a:solidFill>
                   <a:srgbClr val="2B2B2B"/>
                 </a:solidFill>
-                <a:latin typeface="Arial" pitchFamily="34" charset="0"/>
-                <a:ea typeface="Arial" pitchFamily="34" charset="-122"/>
-                <a:cs typeface="Arial" pitchFamily="34" charset="-120"/>
+                <a:latin typeface="Arial" panose="020B0604020202020204" pitchFamily="34" charset="0"/>
+                <a:ea typeface="Arial" panose="020B0604020202020204" pitchFamily="34" charset="-122"/>
+                <a:cs typeface="Arial" panose="020B0604020202020204" pitchFamily="34" charset="-120"/>
               </a:rPr>
               <a:t>倒水游戏是一款基于 HTML5 Canvas 的益智解谜游戏。</a:t>
             </a:r>
             <a:endParaRPr lang="en-US" sz="1500" dirty="0"/>
           </a:p>
           <a:p>
-            <a:pPr indent="0" marL="0">
+            <a:pPr marL="0" indent="0">
               <a:buNone/>
             </a:pPr>
             <a:endParaRPr lang="en-US" sz="1500" dirty="0"/>
           </a:p>
           <a:p>
-            <a:pPr indent="0" marL="0">
+            <a:pPr marL="0" indent="0">
               <a:buNone/>
             </a:pPr>
             <a:r>
@@ -1827,22 +1744,22 @@
                 <a:solidFill>
                   <a:srgbClr val="2B2B2B"/>
                 </a:solidFill>
-                <a:latin typeface="Arial" pitchFamily="34" charset="0"/>
-                <a:ea typeface="Arial" pitchFamily="34" charset="-122"/>
-                <a:cs typeface="Arial" pitchFamily="34" charset="-120"/>
+                <a:latin typeface="Arial" panose="020B0604020202020204" pitchFamily="34" charset="0"/>
+                <a:ea typeface="Arial" panose="020B0604020202020204" pitchFamily="34" charset="-122"/>
+                <a:cs typeface="Arial" panose="020B0604020202020204" pitchFamily="34" charset="-120"/>
               </a:rPr>
               <a:t>玩家通过点击试管将彩色水倒入目标管中，目标是将所有相同颜色的水集中到同一根试管。</a:t>
             </a:r>
             <a:endParaRPr lang="en-US" sz="1500" dirty="0"/>
           </a:p>
           <a:p>
-            <a:pPr indent="0" marL="0">
+            <a:pPr marL="0" indent="0">
               <a:buNone/>
             </a:pPr>
             <a:endParaRPr lang="en-US" sz="1500" dirty="0"/>
           </a:p>
           <a:p>
-            <a:pPr indent="0" marL="0">
+            <a:pPr marL="0" indent="0">
               <a:buNone/>
             </a:pPr>
             <a:r>
@@ -1850,9 +1767,9 @@
                 <a:solidFill>
                   <a:srgbClr val="2B2B2B"/>
                 </a:solidFill>
-                <a:latin typeface="Arial" pitchFamily="34" charset="0"/>
-                <a:ea typeface="Arial" pitchFamily="34" charset="-122"/>
-                <a:cs typeface="Arial" pitchFamily="34" charset="-120"/>
+                <a:latin typeface="Arial" panose="020B0604020202020204" pitchFamily="34" charset="0"/>
+                <a:ea typeface="Arial" panose="020B0604020202020204" pitchFamily="34" charset="-122"/>
+                <a:cs typeface="Arial" panose="020B0604020202020204" pitchFamily="34" charset="-120"/>
               </a:rPr>
               <a:t>纯 JavaScript 单文件实现，不依赖任何第三方框架，1400+ 行代码，无需安装即可在浏览器中运行。</a:t>
             </a:r>
@@ -1877,9 +1794,8 @@
           <a:solidFill>
             <a:srgbClr val="FFFFFF"/>
           </a:solidFill>
-          <a:ln/>
           <a:effectLst>
-            <a:outerShdw sx="100000" sy="100000" kx="0" ky="0" algn="bl" rotWithShape="0" blurRad="50800" dist="12700" dir="16200000">
+            <a:outerShdw blurRad="50800" dist="12700" dir="16200000" algn="bl" rotWithShape="0">
               <a:srgbClr val="000000">
                 <a:alpha val="6000"/>
               </a:srgbClr>
@@ -1902,13 +1818,12 @@
             <a:avLst/>
           </a:prstGeom>
           <a:noFill/>
-          <a:ln/>
-        </p:spPr>
-        <p:txBody>
-          <a:bodyPr wrap="square" rtlCol="0" anchor="ctr"/>
-          <a:lstStyle/>
-          <a:p>
-            <a:pPr algn="ctr" indent="0" marL="0">
+        </p:spPr>
+        <p:txBody>
+          <a:bodyPr wrap="square" rtlCol="0" anchor="ctr"/>
+          <a:lstStyle/>
+          <a:p>
+            <a:pPr marL="0" indent="0" algn="ctr">
               <a:buNone/>
             </a:pPr>
             <a:r>
@@ -1938,13 +1853,12 @@
             <a:avLst/>
           </a:prstGeom>
           <a:noFill/>
-          <a:ln/>
-        </p:spPr>
-        <p:txBody>
-          <a:bodyPr wrap="square" rtlCol="0" anchor="ctr"/>
-          <a:lstStyle/>
-          <a:p>
-            <a:pPr algn="ctr" indent="0" marL="0">
+        </p:spPr>
+        <p:txBody>
+          <a:bodyPr wrap="square" rtlCol="0" anchor="ctr"/>
+          <a:lstStyle/>
+          <a:p>
+            <a:pPr marL="0" indent="0" algn="ctr">
               <a:buNone/>
             </a:pPr>
             <a:r>
@@ -1952,9 +1866,9 @@
                 <a:solidFill>
                   <a:srgbClr val="2B2B2B"/>
                 </a:solidFill>
-                <a:latin typeface="Arial" pitchFamily="34" charset="0"/>
-                <a:ea typeface="Arial" pitchFamily="34" charset="-122"/>
-                <a:cs typeface="Arial" pitchFamily="34" charset="-120"/>
+                <a:latin typeface="Arial" panose="020B0604020202020204" pitchFamily="34" charset="0"/>
+                <a:ea typeface="Arial" panose="020B0604020202020204" pitchFamily="34" charset="-122"/>
+                <a:cs typeface="Arial" panose="020B0604020202020204" pitchFamily="34" charset="-120"/>
               </a:rPr>
               <a:t>点击倒水</a:t>
             </a:r>
@@ -1977,13 +1891,12 @@
             <a:avLst/>
           </a:prstGeom>
           <a:noFill/>
-          <a:ln/>
-        </p:spPr>
-        <p:txBody>
-          <a:bodyPr wrap="square" rtlCol="0" anchor="ctr"/>
-          <a:lstStyle/>
-          <a:p>
-            <a:pPr algn="ctr" indent="0" marL="0">
+        </p:spPr>
+        <p:txBody>
+          <a:bodyPr wrap="square" rtlCol="0" anchor="ctr"/>
+          <a:lstStyle/>
+          <a:p>
+            <a:pPr marL="0" indent="0" algn="ctr">
               <a:buNone/>
             </a:pPr>
             <a:r>
@@ -2015,9 +1928,8 @@
           <a:solidFill>
             <a:srgbClr val="FFFFFF"/>
           </a:solidFill>
-          <a:ln/>
           <a:effectLst>
-            <a:outerShdw sx="100000" sy="100000" kx="0" ky="0" algn="bl" rotWithShape="0" blurRad="50800" dist="12700" dir="16200000">
+            <a:outerShdw blurRad="50800" dist="12700" dir="16200000" algn="bl" rotWithShape="0">
               <a:srgbClr val="000000">
                 <a:alpha val="6000"/>
               </a:srgbClr>
@@ -2040,13 +1952,12 @@
             <a:avLst/>
           </a:prstGeom>
           <a:noFill/>
-          <a:ln/>
-        </p:spPr>
-        <p:txBody>
-          <a:bodyPr wrap="square" rtlCol="0" anchor="ctr"/>
-          <a:lstStyle/>
-          <a:p>
-            <a:pPr algn="ctr" indent="0" marL="0">
+        </p:spPr>
+        <p:txBody>
+          <a:bodyPr wrap="square" rtlCol="0" anchor="ctr"/>
+          <a:lstStyle/>
+          <a:p>
+            <a:pPr marL="0" indent="0" algn="ctr">
               <a:buNone/>
             </a:pPr>
             <a:r>
@@ -2076,13 +1987,12 @@
             <a:avLst/>
           </a:prstGeom>
           <a:noFill/>
-          <a:ln/>
-        </p:spPr>
-        <p:txBody>
-          <a:bodyPr wrap="square" rtlCol="0" anchor="ctr"/>
-          <a:lstStyle/>
-          <a:p>
-            <a:pPr algn="ctr" indent="0" marL="0">
+        </p:spPr>
+        <p:txBody>
+          <a:bodyPr wrap="square" rtlCol="0" anchor="ctr"/>
+          <a:lstStyle/>
+          <a:p>
+            <a:pPr marL="0" indent="0" algn="ctr">
               <a:buNone/>
             </a:pPr>
             <a:r>
@@ -2090,9 +2000,9 @@
                 <a:solidFill>
                   <a:srgbClr val="2B2B2B"/>
                 </a:solidFill>
-                <a:latin typeface="Arial" pitchFamily="34" charset="0"/>
-                <a:ea typeface="Arial" pitchFamily="34" charset="-122"/>
-                <a:cs typeface="Arial" pitchFamily="34" charset="-120"/>
+                <a:latin typeface="Arial" panose="020B0604020202020204" pitchFamily="34" charset="0"/>
+                <a:ea typeface="Arial" panose="020B0604020202020204" pitchFamily="34" charset="-122"/>
+                <a:cs typeface="Arial" panose="020B0604020202020204" pitchFamily="34" charset="-120"/>
               </a:rPr>
               <a:t>撤销系统</a:t>
             </a:r>
@@ -2115,13 +2025,12 @@
             <a:avLst/>
           </a:prstGeom>
           <a:noFill/>
-          <a:ln/>
-        </p:spPr>
-        <p:txBody>
-          <a:bodyPr wrap="square" rtlCol="0" anchor="ctr"/>
-          <a:lstStyle/>
-          <a:p>
-            <a:pPr algn="ctr" indent="0" marL="0">
+        </p:spPr>
+        <p:txBody>
+          <a:bodyPr wrap="square" rtlCol="0" anchor="ctr"/>
+          <a:lstStyle/>
+          <a:p>
+            <a:pPr marL="0" indent="0" algn="ctr">
               <a:buNone/>
             </a:pPr>
             <a:r>
@@ -2153,9 +2062,8 @@
           <a:solidFill>
             <a:srgbClr val="FFFFFF"/>
           </a:solidFill>
-          <a:ln/>
           <a:effectLst>
-            <a:outerShdw sx="100000" sy="100000" kx="0" ky="0" algn="bl" rotWithShape="0" blurRad="50800" dist="12700" dir="16200000">
+            <a:outerShdw blurRad="50800" dist="12700" dir="16200000" algn="bl" rotWithShape="0">
               <a:srgbClr val="000000">
                 <a:alpha val="6000"/>
               </a:srgbClr>
@@ -2178,13 +2086,12 @@
             <a:avLst/>
           </a:prstGeom>
           <a:noFill/>
-          <a:ln/>
-        </p:spPr>
-        <p:txBody>
-          <a:bodyPr wrap="square" rtlCol="0" anchor="ctr"/>
-          <a:lstStyle/>
-          <a:p>
-            <a:pPr algn="ctr" indent="0" marL="0">
+        </p:spPr>
+        <p:txBody>
+          <a:bodyPr wrap="square" rtlCol="0" anchor="ctr"/>
+          <a:lstStyle/>
+          <a:p>
+            <a:pPr marL="0" indent="0" algn="ctr">
               <a:buNone/>
             </a:pPr>
             <a:r>
@@ -2214,13 +2121,12 @@
             <a:avLst/>
           </a:prstGeom>
           <a:noFill/>
-          <a:ln/>
-        </p:spPr>
-        <p:txBody>
-          <a:bodyPr wrap="square" rtlCol="0" anchor="ctr"/>
-          <a:lstStyle/>
-          <a:p>
-            <a:pPr algn="ctr" indent="0" marL="0">
+        </p:spPr>
+        <p:txBody>
+          <a:bodyPr wrap="square" rtlCol="0" anchor="ctr"/>
+          <a:lstStyle/>
+          <a:p>
+            <a:pPr marL="0" indent="0" algn="ctr">
               <a:buNone/>
             </a:pPr>
             <a:r>
@@ -2228,9 +2134,9 @@
                 <a:solidFill>
                   <a:srgbClr val="2B2B2B"/>
                 </a:solidFill>
-                <a:latin typeface="Arial" pitchFamily="34" charset="0"/>
-                <a:ea typeface="Arial" pitchFamily="34" charset="-122"/>
-                <a:cs typeface="Arial" pitchFamily="34" charset="-120"/>
+                <a:latin typeface="Arial" panose="020B0604020202020204" pitchFamily="34" charset="0"/>
+                <a:ea typeface="Arial" panose="020B0604020202020204" pitchFamily="34" charset="-122"/>
+                <a:cs typeface="Arial" panose="020B0604020202020204" pitchFamily="34" charset="-120"/>
               </a:rPr>
               <a:t>精致渲染</a:t>
             </a:r>
@@ -2253,13 +2159,12 @@
             <a:avLst/>
           </a:prstGeom>
           <a:noFill/>
-          <a:ln/>
-        </p:spPr>
-        <p:txBody>
-          <a:bodyPr wrap="square" rtlCol="0" anchor="ctr"/>
-          <a:lstStyle/>
-          <a:p>
-            <a:pPr algn="ctr" indent="0" marL="0">
+        </p:spPr>
+        <p:txBody>
+          <a:bodyPr wrap="square" rtlCol="0" anchor="ctr"/>
+          <a:lstStyle/>
+          <a:p>
+            <a:pPr marL="0" indent="0" algn="ctr">
               <a:buNone/>
             </a:pPr>
             <a:r>
@@ -2291,9 +2196,8 @@
           <a:solidFill>
             <a:srgbClr val="FFFFFF"/>
           </a:solidFill>
-          <a:ln/>
           <a:effectLst>
-            <a:outerShdw sx="100000" sy="100000" kx="0" ky="0" algn="bl" rotWithShape="0" blurRad="50800" dist="12700" dir="16200000">
+            <a:outerShdw blurRad="50800" dist="12700" dir="16200000" algn="bl" rotWithShape="0">
               <a:srgbClr val="000000">
                 <a:alpha val="6000"/>
               </a:srgbClr>
@@ -2316,13 +2220,12 @@
             <a:avLst/>
           </a:prstGeom>
           <a:noFill/>
-          <a:ln/>
-        </p:spPr>
-        <p:txBody>
-          <a:bodyPr wrap="square" rtlCol="0" anchor="ctr"/>
-          <a:lstStyle/>
-          <a:p>
-            <a:pPr algn="ctr" indent="0" marL="0">
+        </p:spPr>
+        <p:txBody>
+          <a:bodyPr wrap="square" rtlCol="0" anchor="ctr"/>
+          <a:lstStyle/>
+          <a:p>
+            <a:pPr marL="0" indent="0" algn="ctr">
               <a:buNone/>
             </a:pPr>
             <a:r>
@@ -2352,13 +2255,12 @@
             <a:avLst/>
           </a:prstGeom>
           <a:noFill/>
-          <a:ln/>
-        </p:spPr>
-        <p:txBody>
-          <a:bodyPr wrap="square" rtlCol="0" anchor="ctr"/>
-          <a:lstStyle/>
-          <a:p>
-            <a:pPr algn="ctr" indent="0" marL="0">
+        </p:spPr>
+        <p:txBody>
+          <a:bodyPr wrap="square" rtlCol="0" anchor="ctr"/>
+          <a:lstStyle/>
+          <a:p>
+            <a:pPr marL="0" indent="0" algn="ctr">
               <a:buNone/>
             </a:pPr>
             <a:r>
@@ -2366,9 +2268,9 @@
                 <a:solidFill>
                   <a:srgbClr val="2B2B2B"/>
                 </a:solidFill>
-                <a:latin typeface="Arial" pitchFamily="34" charset="0"/>
-                <a:ea typeface="Arial" pitchFamily="34" charset="-122"/>
-                <a:cs typeface="Arial" pitchFamily="34" charset="-120"/>
+                <a:latin typeface="Arial" panose="020B0604020202020204" pitchFamily="34" charset="0"/>
+                <a:ea typeface="Arial" panose="020B0604020202020204" pitchFamily="34" charset="-122"/>
+                <a:cs typeface="Arial" panose="020B0604020202020204" pitchFamily="34" charset="-120"/>
               </a:rPr>
               <a:t>多模式</a:t>
             </a:r>
@@ -2391,13 +2293,12 @@
             <a:avLst/>
           </a:prstGeom>
           <a:noFill/>
-          <a:ln/>
-        </p:spPr>
-        <p:txBody>
-          <a:bodyPr wrap="square" rtlCol="0" anchor="ctr"/>
-          <a:lstStyle/>
-          <a:p>
-            <a:pPr algn="ctr" indent="0" marL="0">
+        </p:spPr>
+        <p:txBody>
+          <a:bodyPr wrap="square" rtlCol="0" anchor="ctr"/>
+          <a:lstStyle/>
+          <a:p>
+            <a:pPr marL="0" indent="0" algn="ctr">
               <a:buNone/>
             </a:pPr>
             <a:r>
@@ -2406,7 +2307,7 @@
                   <a:srgbClr val="7A7A7A"/>
                 </a:solidFill>
               </a:rPr>
-              <a:t>闯关 / 经典 / 盲盒 / 变容</a:t>
+              <a:t>闯关  / 盲盒 / 变容</a:t>
             </a:r>
             <a:endParaRPr lang="en-US" sz="1100" dirty="0"/>
           </a:p>
@@ -2427,13 +2328,12 @@
             <a:avLst/>
           </a:prstGeom>
           <a:noFill/>
-          <a:ln/>
-        </p:spPr>
-        <p:txBody>
-          <a:bodyPr wrap="square" rtlCol="0" anchor="ctr"/>
-          <a:lstStyle/>
-          <a:p>
-            <a:pPr algn="ctr" indent="0" marL="0">
+        </p:spPr>
+        <p:txBody>
+          <a:bodyPr wrap="square" rtlCol="0" anchor="ctr"/>
+          <a:lstStyle/>
+          <a:p>
+            <a:pPr marL="0" indent="0" algn="ctr">
               <a:buNone/>
             </a:pPr>
             <a:r>
@@ -2458,12 +2358,13 @@
 
 <file path=ppt/slides/slide3.xml><?xml version="1.0" encoding="utf-8"?>
 <p:sld xmlns:a="http://schemas.openxmlformats.org/drawingml/2006/main" xmlns:r="http://schemas.openxmlformats.org/officeDocument/2006/relationships" xmlns:p="http://schemas.openxmlformats.org/presentationml/2006/main">
-  <p:cSld name="Slide 3">
+  <p:cSld>
     <p:bg>
       <p:bgPr>
         <a:solidFill>
           <a:srgbClr val="F7F5F0"/>
         </a:solidFill>
+        <a:effectLst/>
       </p:bgPr>
     </p:bg>
     <p:spTree>
@@ -2497,7 +2398,6 @@
           <a:solidFill>
             <a:srgbClr val="5BC0BE"/>
           </a:solidFill>
-          <a:ln/>
         </p:spPr>
       </p:sp>
       <p:sp>
@@ -2515,13 +2415,12 @@
             <a:avLst/>
           </a:prstGeom>
           <a:noFill/>
-          <a:ln/>
-        </p:spPr>
-        <p:txBody>
-          <a:bodyPr wrap="square" rtlCol="0" anchor="ctr"/>
-          <a:lstStyle/>
-          <a:p>
-            <a:pPr indent="0" marL="0">
+        </p:spPr>
+        <p:txBody>
+          <a:bodyPr wrap="square" rtlCol="0" anchor="ctr"/>
+          <a:lstStyle/>
+          <a:p>
+            <a:pPr marL="0" indent="0">
               <a:buNone/>
             </a:pPr>
             <a:r>
@@ -2529,9 +2428,9 @@
                 <a:solidFill>
                   <a:srgbClr val="2B2B2B"/>
                 </a:solidFill>
-                <a:latin typeface="Arial" pitchFamily="34" charset="0"/>
-                <a:ea typeface="Arial" pitchFamily="34" charset="-122"/>
-                <a:cs typeface="Arial" pitchFamily="34" charset="-120"/>
+                <a:latin typeface="Arial" panose="020B0604020202020204" pitchFamily="34" charset="0"/>
+                <a:ea typeface="Arial" panose="020B0604020202020204" pitchFamily="34" charset="-122"/>
+                <a:cs typeface="Arial" panose="020B0604020202020204" pitchFamily="34" charset="-120"/>
               </a:rPr>
               <a:t>核心玩法</a:t>
             </a:r>
@@ -2543,7 +2442,11 @@
         <p:nvSpPr>
           <p:cNvPr id="4" name="Shape 2"/>
           <p:cNvSpPr/>
-          <p:nvPr/>
+          <p:nvPr>
+            <p:custDataLst>
+              <p:tags r:id="rId1"/>
+            </p:custDataLst>
+          </p:nvPr>
         </p:nvSpPr>
         <p:spPr>
           <a:xfrm>
@@ -2556,9 +2459,8 @@
           <a:solidFill>
             <a:srgbClr val="FFFFFF"/>
           </a:solidFill>
-          <a:ln/>
           <a:effectLst>
-            <a:outerShdw sx="100000" sy="100000" kx="0" ky="0" algn="bl" rotWithShape="0" blurRad="38100" dist="12700" dir="16200000">
+            <a:outerShdw blurRad="38100" dist="12700" dir="16200000" algn="bl" rotWithShape="0">
               <a:srgbClr val="000000">
                 <a:alpha val="5000"/>
               </a:srgbClr>
@@ -2570,7 +2472,11 @@
         <p:nvSpPr>
           <p:cNvPr id="5" name="Text 3"/>
           <p:cNvSpPr/>
-          <p:nvPr/>
+          <p:nvPr>
+            <p:custDataLst>
+              <p:tags r:id="rId2"/>
+            </p:custDataLst>
+          </p:nvPr>
         </p:nvSpPr>
         <p:spPr>
           <a:xfrm>
@@ -2581,13 +2487,12 @@
             <a:avLst/>
           </a:prstGeom>
           <a:noFill/>
-          <a:ln/>
-        </p:spPr>
-        <p:txBody>
-          <a:bodyPr wrap="square" rtlCol="0" anchor="ctr"/>
-          <a:lstStyle/>
-          <a:p>
-            <a:pPr indent="0" marL="0">
+        </p:spPr>
+        <p:txBody>
+          <a:bodyPr wrap="square" rtlCol="0" anchor="ctr"/>
+          <a:lstStyle/>
+          <a:p>
+            <a:pPr marL="0" indent="0">
               <a:buNone/>
             </a:pPr>
             <a:r>
@@ -2595,9 +2500,9 @@
                 <a:solidFill>
                   <a:srgbClr val="2B2B2B"/>
                 </a:solidFill>
-                <a:latin typeface="Arial" pitchFamily="34" charset="0"/>
-                <a:ea typeface="Arial" pitchFamily="34" charset="-122"/>
-                <a:cs typeface="Arial" pitchFamily="34" charset="-120"/>
+                <a:latin typeface="Arial" panose="020B0604020202020204" pitchFamily="34" charset="0"/>
+                <a:ea typeface="Arial" panose="020B0604020202020204" pitchFamily="34" charset="-122"/>
+                <a:cs typeface="Arial" panose="020B0604020202020204" pitchFamily="34" charset="-120"/>
               </a:rPr>
               <a:t>操作流程</a:t>
             </a:r>
@@ -2609,7 +2514,11 @@
         <p:nvSpPr>
           <p:cNvPr id="6" name="Text 4"/>
           <p:cNvSpPr/>
-          <p:nvPr/>
+          <p:nvPr>
+            <p:custDataLst>
+              <p:tags r:id="rId3"/>
+            </p:custDataLst>
+          </p:nvPr>
         </p:nvSpPr>
         <p:spPr>
           <a:xfrm>
@@ -2620,13 +2529,12 @@
             <a:avLst/>
           </a:prstGeom>
           <a:noFill/>
-          <a:ln/>
         </p:spPr>
         <p:txBody>
           <a:bodyPr wrap="square" rtlCol="0" anchor="t"/>
           <a:lstStyle/>
           <a:p>
-            <a:pPr indent="0" marL="0">
+            <a:pPr marL="0" indent="0">
               <a:spcAft>
                 <a:spcPts val="600"/>
               </a:spcAft>
@@ -2637,16 +2545,16 @@
                 <a:solidFill>
                   <a:srgbClr val="2B2B2B"/>
                 </a:solidFill>
-                <a:latin typeface="Arial" pitchFamily="34" charset="0"/>
-                <a:ea typeface="Arial" pitchFamily="34" charset="-122"/>
-                <a:cs typeface="Arial" pitchFamily="34" charset="-120"/>
+                <a:latin typeface="Arial" panose="020B0604020202020204" pitchFamily="34" charset="0"/>
+                <a:ea typeface="Arial" panose="020B0604020202020204" pitchFamily="34" charset="-122"/>
+                <a:cs typeface="Arial" panose="020B0604020202020204" pitchFamily="34" charset="-120"/>
               </a:rPr>
               <a:t>1. 点击试管 → 选中（出现光晕 + 浮空）</a:t>
             </a:r>
             <a:endParaRPr lang="en-US" sz="1300" dirty="0"/>
           </a:p>
           <a:p>
-            <a:pPr indent="0" marL="0">
+            <a:pPr marL="0" indent="0">
               <a:spcAft>
                 <a:spcPts val="600"/>
               </a:spcAft>
@@ -2657,16 +2565,16 @@
                 <a:solidFill>
                   <a:srgbClr val="2B2B2B"/>
                 </a:solidFill>
-                <a:latin typeface="Arial" pitchFamily="34" charset="0"/>
-                <a:ea typeface="Arial" pitchFamily="34" charset="-122"/>
-                <a:cs typeface="Arial" pitchFamily="34" charset="-120"/>
+                <a:latin typeface="Arial" panose="020B0604020202020204" pitchFamily="34" charset="0"/>
+                <a:ea typeface="Arial" panose="020B0604020202020204" pitchFamily="34" charset="-122"/>
+                <a:cs typeface="Arial" panose="020B0604020202020204" pitchFamily="34" charset="-120"/>
               </a:rPr>
               <a:t>2. 点击另一根试管 → 执行倒水动画</a:t>
             </a:r>
             <a:endParaRPr lang="en-US" sz="1300" dirty="0"/>
           </a:p>
           <a:p>
-            <a:pPr indent="0" marL="0">
+            <a:pPr marL="0" indent="0">
               <a:spcAft>
                 <a:spcPts val="600"/>
               </a:spcAft>
@@ -2677,16 +2585,16 @@
                 <a:solidFill>
                   <a:srgbClr val="2B2B2B"/>
                 </a:solidFill>
-                <a:latin typeface="Arial" pitchFamily="34" charset="0"/>
-                <a:ea typeface="Arial" pitchFamily="34" charset="-122"/>
-                <a:cs typeface="Arial" pitchFamily="34" charset="-120"/>
+                <a:latin typeface="Arial" panose="020B0604020202020204" pitchFamily="34" charset="0"/>
+                <a:ea typeface="Arial" panose="020B0604020202020204" pitchFamily="34" charset="-122"/>
+                <a:cs typeface="Arial" panose="020B0604020202020204" pitchFamily="34" charset="-120"/>
               </a:rPr>
               <a:t>3. 动画：源管飞到目标上方 → 倾斜倒水 → 回正 → 归位</a:t>
             </a:r>
             <a:endParaRPr lang="en-US" sz="1300" dirty="0"/>
           </a:p>
           <a:p>
-            <a:pPr indent="0" marL="0">
+            <a:pPr marL="0" indent="0">
               <a:spcAft>
                 <a:spcPts val="600"/>
               </a:spcAft>
@@ -2697,16 +2605,16 @@
                 <a:solidFill>
                   <a:srgbClr val="2B2B2B"/>
                 </a:solidFill>
-                <a:latin typeface="Arial" pitchFamily="34" charset="0"/>
-                <a:ea typeface="Arial" pitchFamily="34" charset="-122"/>
-                <a:cs typeface="Arial" pitchFamily="34" charset="-120"/>
+                <a:latin typeface="Arial" panose="020B0604020202020204" pitchFamily="34" charset="0"/>
+                <a:ea typeface="Arial" panose="020B0604020202020204" pitchFamily="34" charset="-122"/>
+                <a:cs typeface="Arial" panose="020B0604020202020204" pitchFamily="34" charset="-120"/>
               </a:rPr>
               <a:t>4. 倒水特效：水流、液滴、飞溅、波纹</a:t>
             </a:r>
             <a:endParaRPr lang="en-US" sz="1300" dirty="0"/>
           </a:p>
           <a:p>
-            <a:pPr indent="0" marL="0">
+            <a:pPr marL="0" indent="0">
               <a:spcAft>
                 <a:spcPts val="600"/>
               </a:spcAft>
@@ -2717,16 +2625,16 @@
                 <a:solidFill>
                   <a:srgbClr val="2B2B2B"/>
                 </a:solidFill>
-                <a:latin typeface="Arial" pitchFamily="34" charset="0"/>
-                <a:ea typeface="Arial" pitchFamily="34" charset="-122"/>
-                <a:cs typeface="Arial" pitchFamily="34" charset="-120"/>
+                <a:latin typeface="Arial" panose="020B0604020202020204" pitchFamily="34" charset="0"/>
+                <a:ea typeface="Arial" panose="020B0604020202020204" pitchFamily="34" charset="-122"/>
+                <a:cs typeface="Arial" panose="020B0604020202020204" pitchFamily="34" charset="-120"/>
               </a:rPr>
               <a:t>5. 集齐同色 → 瓶盖自动盖上</a:t>
             </a:r>
             <a:endParaRPr lang="en-US" sz="1300" dirty="0"/>
           </a:p>
           <a:p>
-            <a:pPr indent="0" marL="0">
+            <a:pPr marL="0" indent="0">
               <a:spcAft>
                 <a:spcPts val="600"/>
               </a:spcAft>
@@ -2737,9 +2645,9 @@
                 <a:solidFill>
                   <a:srgbClr val="2B2B2B"/>
                 </a:solidFill>
-                <a:latin typeface="Arial" pitchFamily="34" charset="0"/>
-                <a:ea typeface="Arial" pitchFamily="34" charset="-122"/>
-                <a:cs typeface="Arial" pitchFamily="34" charset="-120"/>
+                <a:latin typeface="Arial" panose="020B0604020202020204" pitchFamily="34" charset="0"/>
+                <a:ea typeface="Arial" panose="020B0604020202020204" pitchFamily="34" charset="-122"/>
+                <a:cs typeface="Arial" panose="020B0604020202020204" pitchFamily="34" charset="-120"/>
               </a:rPr>
               <a:t>6. 全部完成 → 通关！</a:t>
             </a:r>
@@ -2751,7 +2659,11 @@
         <p:nvSpPr>
           <p:cNvPr id="7" name="Shape 5"/>
           <p:cNvSpPr/>
-          <p:nvPr/>
+          <p:nvPr>
+            <p:custDataLst>
+              <p:tags r:id="rId4"/>
+            </p:custDataLst>
+          </p:nvPr>
         </p:nvSpPr>
         <p:spPr>
           <a:xfrm>
@@ -2764,9 +2676,8 @@
           <a:solidFill>
             <a:srgbClr val="FFFFFF"/>
           </a:solidFill>
-          <a:ln/>
           <a:effectLst>
-            <a:outerShdw sx="100000" sy="100000" kx="0" ky="0" algn="bl" rotWithShape="0" blurRad="38100" dist="12700" dir="16200000">
+            <a:outerShdw blurRad="38100" dist="12700" dir="16200000" algn="bl" rotWithShape="0">
               <a:srgbClr val="000000">
                 <a:alpha val="5000"/>
               </a:srgbClr>
@@ -2778,7 +2689,11 @@
         <p:nvSpPr>
           <p:cNvPr id="8" name="Text 6"/>
           <p:cNvSpPr/>
-          <p:nvPr/>
+          <p:nvPr>
+            <p:custDataLst>
+              <p:tags r:id="rId5"/>
+            </p:custDataLst>
+          </p:nvPr>
         </p:nvSpPr>
         <p:spPr>
           <a:xfrm>
@@ -2789,13 +2704,12 @@
             <a:avLst/>
           </a:prstGeom>
           <a:noFill/>
-          <a:ln/>
-        </p:spPr>
-        <p:txBody>
-          <a:bodyPr wrap="square" rtlCol="0" anchor="ctr"/>
-          <a:lstStyle/>
-          <a:p>
-            <a:pPr indent="0" marL="0">
+        </p:spPr>
+        <p:txBody>
+          <a:bodyPr wrap="square" rtlCol="0" anchor="ctr"/>
+          <a:lstStyle/>
+          <a:p>
+            <a:pPr marL="0" indent="0">
               <a:buNone/>
             </a:pPr>
             <a:r>
@@ -2803,9 +2717,9 @@
                 <a:solidFill>
                   <a:srgbClr val="2B2B2B"/>
                 </a:solidFill>
-                <a:latin typeface="Arial" pitchFamily="34" charset="0"/>
-                <a:ea typeface="Arial" pitchFamily="34" charset="-122"/>
-                <a:cs typeface="Arial" pitchFamily="34" charset="-120"/>
+                <a:latin typeface="Arial" panose="020B0604020202020204" pitchFamily="34" charset="0"/>
+                <a:ea typeface="Arial" panose="020B0604020202020204" pitchFamily="34" charset="-122"/>
+                <a:cs typeface="Arial" panose="020B0604020202020204" pitchFamily="34" charset="-120"/>
               </a:rPr>
               <a:t>游戏规则</a:t>
             </a:r>
@@ -2817,7 +2731,11 @@
         <p:nvSpPr>
           <p:cNvPr id="9" name="Text 7"/>
           <p:cNvSpPr/>
-          <p:nvPr/>
+          <p:nvPr>
+            <p:custDataLst>
+              <p:tags r:id="rId6"/>
+            </p:custDataLst>
+          </p:nvPr>
         </p:nvSpPr>
         <p:spPr>
           <a:xfrm>
@@ -2828,7 +2746,6 @@
             <a:avLst/>
           </a:prstGeom>
           <a:noFill/>
-          <a:ln/>
         </p:spPr>
         <p:txBody>
           <a:bodyPr wrap="square" rtlCol="0" anchor="t"/>
@@ -2843,9 +2760,9 @@
                 <a:solidFill>
                   <a:srgbClr val="2B2B2B"/>
                 </a:solidFill>
-                <a:latin typeface="Arial" pitchFamily="34" charset="0"/>
-                <a:ea typeface="Arial" pitchFamily="34" charset="-122"/>
-                <a:cs typeface="Arial" pitchFamily="34" charset="-120"/>
+                <a:latin typeface="Arial" panose="020B0604020202020204" pitchFamily="34" charset="0"/>
+                <a:ea typeface="Arial" panose="020B0604020202020204" pitchFamily="34" charset="-122"/>
+                <a:cs typeface="Arial" panose="020B0604020202020204" pitchFamily="34" charset="-120"/>
               </a:rPr>
               <a:t>源管不能为空，目标管必须有空位</a:t>
             </a:r>
@@ -2861,9 +2778,9 @@
                 <a:solidFill>
                   <a:srgbClr val="2B2B2B"/>
                 </a:solidFill>
-                <a:latin typeface="Arial" pitchFamily="34" charset="0"/>
-                <a:ea typeface="Arial" pitchFamily="34" charset="-122"/>
-                <a:cs typeface="Arial" pitchFamily="34" charset="-120"/>
+                <a:latin typeface="Arial" panose="020B0604020202020204" pitchFamily="34" charset="0"/>
+                <a:ea typeface="Arial" panose="020B0604020202020204" pitchFamily="34" charset="-122"/>
+                <a:cs typeface="Arial" panose="020B0604020202020204" pitchFamily="34" charset="-120"/>
               </a:rPr>
               <a:t>目标顶层颜色必须与源管相同（或为空）</a:t>
             </a:r>
@@ -2879,9 +2796,9 @@
                 <a:solidFill>
                   <a:srgbClr val="2B2B2B"/>
                 </a:solidFill>
-                <a:latin typeface="Arial" pitchFamily="34" charset="0"/>
-                <a:ea typeface="Arial" pitchFamily="34" charset="-122"/>
-                <a:cs typeface="Arial" pitchFamily="34" charset="-120"/>
+                <a:latin typeface="Arial" panose="020B0604020202020204" pitchFamily="34" charset="0"/>
+                <a:ea typeface="Arial" panose="020B0604020202020204" pitchFamily="34" charset="-122"/>
+                <a:cs typeface="Arial" panose="020B0604020202020204" pitchFamily="34" charset="-120"/>
               </a:rPr>
               <a:t>每管默认容量 4 层（变容模式 4-7）</a:t>
             </a:r>
@@ -2897,9 +2814,9 @@
                 <a:solidFill>
                   <a:srgbClr val="2B2B2B"/>
                 </a:solidFill>
-                <a:latin typeface="Arial" pitchFamily="34" charset="0"/>
-                <a:ea typeface="Arial" pitchFamily="34" charset="-122"/>
-                <a:cs typeface="Arial" pitchFamily="34" charset="-120"/>
+                <a:latin typeface="Arial" panose="020B0604020202020204" pitchFamily="34" charset="0"/>
+                <a:ea typeface="Arial" panose="020B0604020202020204" pitchFamily="34" charset="-122"/>
+                <a:cs typeface="Arial" panose="020B0604020202020204" pitchFamily="34" charset="-120"/>
               </a:rPr>
               <a:t>全部单色或全空 = 通关</a:t>
             </a:r>
@@ -2915,9 +2832,9 @@
                 <a:solidFill>
                   <a:srgbClr val="2B2B2B"/>
                 </a:solidFill>
-                <a:latin typeface="Arial" pitchFamily="34" charset="0"/>
-                <a:ea typeface="Arial" pitchFamily="34" charset="-122"/>
-                <a:cs typeface="Arial" pitchFamily="34" charset="-120"/>
+                <a:latin typeface="Arial" panose="020B0604020202020204" pitchFamily="34" charset="0"/>
+                <a:ea typeface="Arial" panose="020B0604020202020204" pitchFamily="34" charset="-122"/>
+                <a:cs typeface="Arial" panose="020B0604020202020204" pitchFamily="34" charset="-120"/>
               </a:rPr>
               <a:t>步数计数 + Ctrl+Z 撤销 + R 重来</a:t>
             </a:r>
@@ -2933,9 +2850,9 @@
                 <a:solidFill>
                   <a:srgbClr val="2B2B2B"/>
                 </a:solidFill>
-                <a:latin typeface="Arial" pitchFamily="34" charset="0"/>
-                <a:ea typeface="Arial" pitchFamily="34" charset="-122"/>
-                <a:cs typeface="Arial" pitchFamily="34" charset="-120"/>
+                <a:latin typeface="Arial" panose="020B0604020202020204" pitchFamily="34" charset="0"/>
+                <a:ea typeface="Arial" panose="020B0604020202020204" pitchFamily="34" charset="-122"/>
+                <a:cs typeface="Arial" panose="020B0604020202020204" pitchFamily="34" charset="-120"/>
               </a:rPr>
               <a:t>拖拽自由移动管子位置</a:t>
             </a:r>
@@ -2958,13 +2875,12 @@
             <a:avLst/>
           </a:prstGeom>
           <a:noFill/>
-          <a:ln/>
-        </p:spPr>
-        <p:txBody>
-          <a:bodyPr wrap="square" rtlCol="0" anchor="ctr"/>
-          <a:lstStyle/>
-          <a:p>
-            <a:pPr algn="ctr" indent="0" marL="0">
+        </p:spPr>
+        <p:txBody>
+          <a:bodyPr wrap="square" rtlCol="0" anchor="ctr"/>
+          <a:lstStyle/>
+          <a:p>
+            <a:pPr marL="0" indent="0" algn="ctr">
               <a:buNone/>
             </a:pPr>
             <a:r>
@@ -2989,12 +2905,13 @@
 
 <file path=ppt/slides/slide4.xml><?xml version="1.0" encoding="utf-8"?>
 <p:sld xmlns:a="http://schemas.openxmlformats.org/drawingml/2006/main" xmlns:r="http://schemas.openxmlformats.org/officeDocument/2006/relationships" xmlns:p="http://schemas.openxmlformats.org/presentationml/2006/main">
-  <p:cSld name="Slide 4">
+  <p:cSld>
     <p:bg>
       <p:bgPr>
         <a:solidFill>
           <a:srgbClr val="F7F5F0"/>
         </a:solidFill>
+        <a:effectLst/>
       </p:bgPr>
     </p:bg>
     <p:spTree>
@@ -3028,7 +2945,6 @@
           <a:solidFill>
             <a:srgbClr val="D4A853"/>
           </a:solidFill>
-          <a:ln/>
         </p:spPr>
       </p:sp>
       <p:sp>
@@ -3046,13 +2962,12 @@
             <a:avLst/>
           </a:prstGeom>
           <a:noFill/>
-          <a:ln/>
-        </p:spPr>
-        <p:txBody>
-          <a:bodyPr wrap="square" rtlCol="0" anchor="ctr"/>
-          <a:lstStyle/>
-          <a:p>
-            <a:pPr indent="0" marL="0">
+        </p:spPr>
+        <p:txBody>
+          <a:bodyPr wrap="square" rtlCol="0" anchor="ctr"/>
+          <a:lstStyle/>
+          <a:p>
+            <a:pPr marL="0" indent="0">
               <a:buNone/>
             </a:pPr>
             <a:r>
@@ -3060,9 +2975,9 @@
                 <a:solidFill>
                   <a:srgbClr val="2B2B2B"/>
                 </a:solidFill>
-                <a:latin typeface="Arial" pitchFamily="34" charset="0"/>
-                <a:ea typeface="Arial" pitchFamily="34" charset="-122"/>
-                <a:cs typeface="Arial" pitchFamily="34" charset="-120"/>
+                <a:latin typeface="Arial" panose="020B0604020202020204" pitchFamily="34" charset="0"/>
+                <a:ea typeface="Arial" panose="020B0604020202020204" pitchFamily="34" charset="-122"/>
+                <a:cs typeface="Arial" panose="020B0604020202020204" pitchFamily="34" charset="-120"/>
               </a:rPr>
               <a:t>特色功能</a:t>
             </a:r>
@@ -3087,9 +3002,8 @@
           <a:solidFill>
             <a:srgbClr val="FFFFFF"/>
           </a:solidFill>
-          <a:ln/>
           <a:effectLst>
-            <a:outerShdw sx="100000" sy="100000" kx="0" ky="0" algn="bl" rotWithShape="0" blurRad="38100" dist="12700" dir="16200000">
+            <a:outerShdw blurRad="38100" dist="12700" dir="16200000" algn="bl" rotWithShape="0">
               <a:srgbClr val="000000">
                 <a:alpha val="5000"/>
               </a:srgbClr>
@@ -3112,13 +3026,12 @@
             <a:avLst/>
           </a:prstGeom>
           <a:noFill/>
-          <a:ln/>
-        </p:spPr>
-        <p:txBody>
-          <a:bodyPr wrap="square" rtlCol="0" anchor="ctr"/>
-          <a:lstStyle/>
-          <a:p>
-            <a:pPr indent="0" marL="0">
+        </p:spPr>
+        <p:txBody>
+          <a:bodyPr wrap="square" rtlCol="0" anchor="ctr"/>
+          <a:lstStyle/>
+          <a:p>
+            <a:pPr marL="0" indent="0">
               <a:buNone/>
             </a:pPr>
             <a:r>
@@ -3126,9 +3039,9 @@
                 <a:solidFill>
                   <a:srgbClr val="2B2B2B"/>
                 </a:solidFill>
-                <a:latin typeface="Arial" pitchFamily="34" charset="0"/>
-                <a:ea typeface="Arial" pitchFamily="34" charset="-122"/>
-                <a:cs typeface="Arial" pitchFamily="34" charset="-120"/>
+                <a:latin typeface="Arial" panose="020B0604020202020204" pitchFamily="34" charset="0"/>
+                <a:ea typeface="Arial" panose="020B0604020202020204" pitchFamily="34" charset="-122"/>
+                <a:cs typeface="Arial" panose="020B0604020202020204" pitchFamily="34" charset="-120"/>
               </a:rPr>
               <a:t>🎁  盲盒模式</a:t>
             </a:r>
@@ -3151,13 +3064,12 @@
             <a:avLst/>
           </a:prstGeom>
           <a:noFill/>
-          <a:ln/>
-        </p:spPr>
-        <p:txBody>
-          <a:bodyPr wrap="square" rtlCol="0" anchor="ctr"/>
-          <a:lstStyle/>
-          <a:p>
-            <a:pPr indent="0" marL="0">
+        </p:spPr>
+        <p:txBody>
+          <a:bodyPr wrap="square" rtlCol="0" anchor="ctr"/>
+          <a:lstStyle/>
+          <a:p>
+            <a:pPr marL="0" indent="0">
               <a:buNone/>
             </a:pPr>
             <a:r>
@@ -3165,9 +3077,9 @@
                 <a:solidFill>
                   <a:srgbClr val="7A7A7A"/>
                 </a:solidFill>
-                <a:latin typeface="Arial" pitchFamily="34" charset="0"/>
-                <a:ea typeface="Arial" pitchFamily="34" charset="-122"/>
-                <a:cs typeface="Arial" pitchFamily="34" charset="-120"/>
+                <a:latin typeface="Arial" panose="020B0604020202020204" pitchFamily="34" charset="0"/>
+                <a:ea typeface="Arial" panose="020B0604020202020204" pitchFamily="34" charset="-122"/>
+                <a:cs typeface="Arial" panose="020B0604020202020204" pitchFamily="34" charset="-120"/>
               </a:rPr>
               <a:t>底部水层被彩虹流彩遮挡，上层倒空后逐层揭示，考验记忆力</a:t>
             </a:r>
@@ -3192,9 +3104,8 @@
           <a:solidFill>
             <a:srgbClr val="FFFFFF"/>
           </a:solidFill>
-          <a:ln/>
           <a:effectLst>
-            <a:outerShdw sx="100000" sy="100000" kx="0" ky="0" algn="bl" rotWithShape="0" blurRad="38100" dist="12700" dir="16200000">
+            <a:outerShdw blurRad="38100" dist="12700" dir="16200000" algn="bl" rotWithShape="0">
               <a:srgbClr val="000000">
                 <a:alpha val="5000"/>
               </a:srgbClr>
@@ -3217,13 +3128,12 @@
             <a:avLst/>
           </a:prstGeom>
           <a:noFill/>
-          <a:ln/>
-        </p:spPr>
-        <p:txBody>
-          <a:bodyPr wrap="square" rtlCol="0" anchor="ctr"/>
-          <a:lstStyle/>
-          <a:p>
-            <a:pPr indent="0" marL="0">
+        </p:spPr>
+        <p:txBody>
+          <a:bodyPr wrap="square" rtlCol="0" anchor="ctr"/>
+          <a:lstStyle/>
+          <a:p>
+            <a:pPr marL="0" indent="0">
               <a:buNone/>
             </a:pPr>
             <a:r>
@@ -3231,9 +3141,9 @@
                 <a:solidFill>
                   <a:srgbClr val="2B2B2B"/>
                 </a:solidFill>
-                <a:latin typeface="Arial" pitchFamily="34" charset="0"/>
-                <a:ea typeface="Arial" pitchFamily="34" charset="-122"/>
-                <a:cs typeface="Arial" pitchFamily="34" charset="-120"/>
+                <a:latin typeface="Arial" panose="020B0604020202020204" pitchFamily="34" charset="0"/>
+                <a:ea typeface="Arial" panose="020B0604020202020204" pitchFamily="34" charset="-122"/>
+                <a:cs typeface="Arial" panose="020B0604020202020204" pitchFamily="34" charset="-120"/>
               </a:rPr>
               <a:t>🧪  变容模式</a:t>
             </a:r>
@@ -3256,13 +3166,12 @@
             <a:avLst/>
           </a:prstGeom>
           <a:noFill/>
-          <a:ln/>
-        </p:spPr>
-        <p:txBody>
-          <a:bodyPr wrap="square" rtlCol="0" anchor="ctr"/>
-          <a:lstStyle/>
-          <a:p>
-            <a:pPr indent="0" marL="0">
+        </p:spPr>
+        <p:txBody>
+          <a:bodyPr wrap="square" rtlCol="0" anchor="ctr"/>
+          <a:lstStyle/>
+          <a:p>
+            <a:pPr marL="0" indent="0">
               <a:buNone/>
             </a:pPr>
             <a:r>
@@ -3270,9 +3179,9 @@
                 <a:solidFill>
                   <a:srgbClr val="7A7A7A"/>
                 </a:solidFill>
-                <a:latin typeface="Arial" pitchFamily="34" charset="0"/>
-                <a:ea typeface="Arial" pitchFamily="34" charset="-122"/>
-                <a:cs typeface="Arial" pitchFamily="34" charset="-120"/>
+                <a:latin typeface="Arial" panose="020B0604020202020204" pitchFamily="34" charset="0"/>
+                <a:ea typeface="Arial" panose="020B0604020202020204" pitchFamily="34" charset="-122"/>
+                <a:cs typeface="Arial" panose="020B0604020202020204" pitchFamily="34" charset="-120"/>
               </a:rPr>
               <a:t>每管容量不同(4-7层)，必须将颜色倒入容量匹配的管子</a:t>
             </a:r>
@@ -3297,9 +3206,8 @@
           <a:solidFill>
             <a:srgbClr val="FFFFFF"/>
           </a:solidFill>
-          <a:ln/>
           <a:effectLst>
-            <a:outerShdw sx="100000" sy="100000" kx="0" ky="0" algn="bl" rotWithShape="0" blurRad="38100" dist="12700" dir="16200000">
+            <a:outerShdw blurRad="38100" dist="12700" dir="16200000" algn="bl" rotWithShape="0">
               <a:srgbClr val="000000">
                 <a:alpha val="5000"/>
               </a:srgbClr>
@@ -3322,13 +3230,12 @@
             <a:avLst/>
           </a:prstGeom>
           <a:noFill/>
-          <a:ln/>
-        </p:spPr>
-        <p:txBody>
-          <a:bodyPr wrap="square" rtlCol="0" anchor="ctr"/>
-          <a:lstStyle/>
-          <a:p>
-            <a:pPr indent="0" marL="0">
+        </p:spPr>
+        <p:txBody>
+          <a:bodyPr wrap="square" rtlCol="0" anchor="ctr"/>
+          <a:lstStyle/>
+          <a:p>
+            <a:pPr marL="0" indent="0">
               <a:buNone/>
             </a:pPr>
             <a:r>
@@ -3336,9 +3243,9 @@
                 <a:solidFill>
                   <a:srgbClr val="2B2B2B"/>
                 </a:solidFill>
-                <a:latin typeface="Arial" pitchFamily="34" charset="0"/>
-                <a:ea typeface="Arial" pitchFamily="34" charset="-122"/>
-                <a:cs typeface="Arial" pitchFamily="34" charset="-120"/>
+                <a:latin typeface="Arial" panose="020B0604020202020204" pitchFamily="34" charset="0"/>
+                <a:ea typeface="Arial" panose="020B0604020202020204" pitchFamily="34" charset="-122"/>
+                <a:cs typeface="Arial" panose="020B0604020202020204" pitchFamily="34" charset="-120"/>
               </a:rPr>
               <a:t>✋  拖拽系统</a:t>
             </a:r>
@@ -3361,13 +3268,12 @@
             <a:avLst/>
           </a:prstGeom>
           <a:noFill/>
-          <a:ln/>
-        </p:spPr>
-        <p:txBody>
-          <a:bodyPr wrap="square" rtlCol="0" anchor="ctr"/>
-          <a:lstStyle/>
-          <a:p>
-            <a:pPr indent="0" marL="0">
+        </p:spPr>
+        <p:txBody>
+          <a:bodyPr wrap="square" rtlCol="0" anchor="ctr"/>
+          <a:lstStyle/>
+          <a:p>
+            <a:pPr marL="0" indent="0">
               <a:buNone/>
             </a:pPr>
             <a:r>
@@ -3375,9 +3281,9 @@
                 <a:solidFill>
                   <a:srgbClr val="7A7A7A"/>
                 </a:solidFill>
-                <a:latin typeface="Arial" pitchFamily="34" charset="0"/>
-                <a:ea typeface="Arial" pitchFamily="34" charset="-122"/>
-                <a:cs typeface="Arial" pitchFamily="34" charset="-120"/>
+                <a:latin typeface="Arial" panose="020B0604020202020204" pitchFamily="34" charset="0"/>
+                <a:ea typeface="Arial" panose="020B0604020202020204" pitchFamily="34" charset="-122"/>
+                <a:cs typeface="Arial" panose="020B0604020202020204" pitchFamily="34" charset="-120"/>
               </a:rPr>
               <a:t>自由拖拽移动试管到任意位置，松手弹开到最近空地</a:t>
             </a:r>
@@ -3402,9 +3308,8 @@
           <a:solidFill>
             <a:srgbClr val="FFFFFF"/>
           </a:solidFill>
-          <a:ln/>
           <a:effectLst>
-            <a:outerShdw sx="100000" sy="100000" kx="0" ky="0" algn="bl" rotWithShape="0" blurRad="38100" dist="12700" dir="16200000">
+            <a:outerShdw blurRad="38100" dist="12700" dir="16200000" algn="bl" rotWithShape="0">
               <a:srgbClr val="000000">
                 <a:alpha val="5000"/>
               </a:srgbClr>
@@ -3427,13 +3332,12 @@
             <a:avLst/>
           </a:prstGeom>
           <a:noFill/>
-          <a:ln/>
-        </p:spPr>
-        <p:txBody>
-          <a:bodyPr wrap="square" rtlCol="0" anchor="ctr"/>
-          <a:lstStyle/>
-          <a:p>
-            <a:pPr indent="0" marL="0">
+        </p:spPr>
+        <p:txBody>
+          <a:bodyPr wrap="square" rtlCol="0" anchor="ctr"/>
+          <a:lstStyle/>
+          <a:p>
+            <a:pPr marL="0" indent="0">
               <a:buNone/>
             </a:pPr>
             <a:r>
@@ -3441,9 +3345,9 @@
                 <a:solidFill>
                   <a:srgbClr val="2B2B2B"/>
                 </a:solidFill>
-                <a:latin typeface="Arial" pitchFamily="34" charset="0"/>
-                <a:ea typeface="Arial" pitchFamily="34" charset="-122"/>
-                <a:cs typeface="Arial" pitchFamily="34" charset="-120"/>
+                <a:latin typeface="Arial" panose="020B0604020202020204" pitchFamily="34" charset="0"/>
+                <a:ea typeface="Arial" panose="020B0604020202020204" pitchFamily="34" charset="-122"/>
+                <a:cs typeface="Arial" panose="020B0604020202020204" pitchFamily="34" charset="-120"/>
               </a:rPr>
               <a:t>🔧  关卡自制器</a:t>
             </a:r>
@@ -3466,13 +3370,12 @@
             <a:avLst/>
           </a:prstGeom>
           <a:noFill/>
-          <a:ln/>
-        </p:spPr>
-        <p:txBody>
-          <a:bodyPr wrap="square" rtlCol="0" anchor="ctr"/>
-          <a:lstStyle/>
-          <a:p>
-            <a:pPr indent="0" marL="0">
+        </p:spPr>
+        <p:txBody>
+          <a:bodyPr wrap="square" rtlCol="0" anchor="ctr"/>
+          <a:lstStyle/>
+          <a:p>
+            <a:pPr marL="0" indent="0">
               <a:buNone/>
             </a:pPr>
             <a:r>
@@ -3480,9 +3383,9 @@
                 <a:solidFill>
                   <a:srgbClr val="7A7A7A"/>
                 </a:solidFill>
-                <a:latin typeface="Arial" pitchFamily="34" charset="0"/>
-                <a:ea typeface="Arial" pitchFamily="34" charset="-122"/>
-                <a:cs typeface="Arial" pitchFamily="34" charset="-120"/>
+                <a:latin typeface="Arial" panose="020B0604020202020204" pitchFamily="34" charset="0"/>
+                <a:ea typeface="Arial" panose="020B0604020202020204" pitchFamily="34" charset="-122"/>
+                <a:cs typeface="Arial" panose="020B0604020202020204" pitchFamily="34" charset="-120"/>
               </a:rPr>
               <a:t>可视化编辑 + 盲盒/变容设置 + 可解性检测(DFS)</a:t>
             </a:r>
@@ -3507,9 +3410,8 @@
           <a:solidFill>
             <a:srgbClr val="FFFFFF"/>
           </a:solidFill>
-          <a:ln/>
           <a:effectLst>
-            <a:outerShdw sx="100000" sy="100000" kx="0" ky="0" algn="bl" rotWithShape="0" blurRad="38100" dist="12700" dir="16200000">
+            <a:outerShdw blurRad="38100" dist="12700" dir="16200000" algn="bl" rotWithShape="0">
               <a:srgbClr val="000000">
                 <a:alpha val="5000"/>
               </a:srgbClr>
@@ -3532,13 +3434,12 @@
             <a:avLst/>
           </a:prstGeom>
           <a:noFill/>
-          <a:ln/>
-        </p:spPr>
-        <p:txBody>
-          <a:bodyPr wrap="square" rtlCol="0" anchor="ctr"/>
-          <a:lstStyle/>
-          <a:p>
-            <a:pPr indent="0" marL="0">
+        </p:spPr>
+        <p:txBody>
+          <a:bodyPr wrap="square" rtlCol="0" anchor="ctr"/>
+          <a:lstStyle/>
+          <a:p>
+            <a:pPr marL="0" indent="0">
               <a:buNone/>
             </a:pPr>
             <a:r>
@@ -3546,13 +3447,31 @@
                 <a:solidFill>
                   <a:srgbClr val="2B2B2B"/>
                 </a:solidFill>
-                <a:latin typeface="Arial" pitchFamily="34" charset="0"/>
-                <a:ea typeface="Arial" pitchFamily="34" charset="-122"/>
-                <a:cs typeface="Arial" pitchFamily="34" charset="-120"/>
-              </a:rPr>
-              <a:t>🏛  84经典关卡</a:t>
-            </a:r>
-            <a:endParaRPr lang="en-US" sz="1500" dirty="0"/>
+                <a:latin typeface="Arial" panose="020B0604020202020204" pitchFamily="34" charset="0"/>
+                <a:ea typeface="Arial" panose="020B0604020202020204" pitchFamily="34" charset="-122"/>
+                <a:cs typeface="Arial" panose="020B0604020202020204" pitchFamily="34" charset="-120"/>
+              </a:rPr>
+              <a:t>🏛  </a:t>
+            </a:r>
+            <a:r>
+              <a:rPr lang="zh-CN" altLang="en-US" sz="1500" b="1" dirty="0">
+                <a:solidFill>
+                  <a:srgbClr val="2B2B2B"/>
+                </a:solidFill>
+                <a:latin typeface="Arial" panose="020B0604020202020204" pitchFamily="34" charset="0"/>
+                <a:ea typeface="Arial" panose="020B0604020202020204" pitchFamily="34" charset="-122"/>
+                <a:cs typeface="Arial" panose="020B0604020202020204" pitchFamily="34" charset="-120"/>
+              </a:rPr>
+              <a:t>重新来过</a:t>
+            </a:r>
+            <a:endParaRPr lang="zh-CN" altLang="en-US" sz="1500" b="1" dirty="0">
+              <a:solidFill>
+                <a:srgbClr val="2B2B2B"/>
+              </a:solidFill>
+              <a:latin typeface="Arial" panose="020B0604020202020204" pitchFamily="34" charset="0"/>
+              <a:ea typeface="Arial" panose="020B0604020202020204" pitchFamily="34" charset="-122"/>
+              <a:cs typeface="Arial" panose="020B0604020202020204" pitchFamily="34" charset="-120"/>
+            </a:endParaRPr>
           </a:p>
         </p:txBody>
       </p:sp>
@@ -3571,27 +3490,77 @@
             <a:avLst/>
           </a:prstGeom>
           <a:noFill/>
-          <a:ln/>
-        </p:spPr>
-        <p:txBody>
-          <a:bodyPr wrap="square" rtlCol="0" anchor="ctr"/>
-          <a:lstStyle/>
-          <a:p>
-            <a:pPr indent="0" marL="0">
-              <a:buNone/>
-            </a:pPr>
-            <a:r>
-              <a:rPr lang="en-US" sz="1200" dirty="0">
-                <a:solidFill>
-                  <a:srgbClr val="7A7A7A"/>
-                </a:solidFill>
-                <a:latin typeface="Arial" pitchFamily="34" charset="0"/>
-                <a:ea typeface="Arial" pitchFamily="34" charset="-122"/>
-                <a:cs typeface="Arial" pitchFamily="34" charset="-120"/>
-              </a:rPr>
-              <a:t>6档难度分组，从入门(4管)到大师(16管)</a:t>
-            </a:r>
-            <a:endParaRPr lang="en-US" sz="1200" dirty="0"/>
+        </p:spPr>
+        <p:txBody>
+          <a:bodyPr wrap="square" rtlCol="0" anchor="ctr"/>
+          <a:lstStyle/>
+          <a:p>
+            <a:pPr marL="0" indent="0">
+              <a:buNone/>
+            </a:pPr>
+            <a:endParaRPr lang="zh-CN" altLang="en-US" sz="1200" dirty="0">
+              <a:latin typeface="Arial" panose="020B0604020202020204" pitchFamily="34" charset="0"/>
+              <a:cs typeface="Arial" panose="020B0604020202020204" pitchFamily="34" charset="0"/>
+              <a:sym typeface="+mn-ea"/>
+            </a:endParaRPr>
+          </a:p>
+          <a:p>
+            <a:pPr marL="0" indent="0">
+              <a:buNone/>
+            </a:pPr>
+            <a:r>
+              <a:rPr lang="zh-CN" altLang="en-US" sz="1200" dirty="0">
+                <a:latin typeface="Arial" panose="020B0604020202020204" pitchFamily="34" charset="0"/>
+                <a:cs typeface="Arial" panose="020B0604020202020204" pitchFamily="34" charset="0"/>
+                <a:sym typeface="+mn-ea"/>
+              </a:rPr>
+              <a:t>可以通过</a:t>
+            </a:r>
+            <a:r>
+              <a:rPr lang="en-US" altLang="zh-CN" sz="1200" dirty="0">
+                <a:latin typeface="Arial" panose="020B0604020202020204" pitchFamily="34" charset="0"/>
+                <a:cs typeface="Arial" panose="020B0604020202020204" pitchFamily="34" charset="0"/>
+                <a:sym typeface="+mn-ea"/>
+              </a:rPr>
+              <a:t>“</a:t>
+            </a:r>
+            <a:r>
+              <a:rPr lang="zh-CN" altLang="en-US" sz="1200" dirty="0">
+                <a:latin typeface="Arial" panose="020B0604020202020204" pitchFamily="34" charset="0"/>
+                <a:cs typeface="Arial" panose="020B0604020202020204" pitchFamily="34" charset="0"/>
+                <a:sym typeface="+mn-ea"/>
+              </a:rPr>
+              <a:t>重来</a:t>
+            </a:r>
+            <a:r>
+              <a:rPr lang="en-US" altLang="zh-CN" sz="1200" dirty="0">
+                <a:latin typeface="Arial" panose="020B0604020202020204" pitchFamily="34" charset="0"/>
+                <a:cs typeface="Arial" panose="020B0604020202020204" pitchFamily="34" charset="0"/>
+                <a:sym typeface="+mn-ea"/>
+              </a:rPr>
+              <a:t>”</a:t>
+            </a:r>
+            <a:r>
+              <a:rPr lang="zh-CN" altLang="en-US" sz="1200" dirty="0">
+                <a:latin typeface="Arial" panose="020B0604020202020204" pitchFamily="34" charset="0"/>
+                <a:cs typeface="Arial" panose="020B0604020202020204" pitchFamily="34" charset="0"/>
+                <a:sym typeface="+mn-ea"/>
+              </a:rPr>
+              <a:t>，一夜回到解放前</a:t>
+            </a:r>
+            <a:endParaRPr lang="zh-CN" altLang="en-US" sz="1200" dirty="0">
+              <a:latin typeface="Arial" panose="020B0604020202020204" pitchFamily="34" charset="0"/>
+              <a:cs typeface="Arial" panose="020B0604020202020204" pitchFamily="34" charset="0"/>
+            </a:endParaRPr>
+          </a:p>
+          <a:p>
+            <a:pPr marL="0" indent="0">
+              <a:buNone/>
+            </a:pPr>
+            <a:endParaRPr lang="en-US" sz="1200" dirty="0">
+              <a:latin typeface="Arial" panose="020B0604020202020204" pitchFamily="34" charset="0"/>
+              <a:cs typeface="Arial" panose="020B0604020202020204" pitchFamily="34" charset="0"/>
+            </a:endParaRPr>
           </a:p>
         </p:txBody>
       </p:sp>
@@ -3612,9 +3581,8 @@
           <a:solidFill>
             <a:srgbClr val="FFFFFF"/>
           </a:solidFill>
-          <a:ln/>
           <a:effectLst>
-            <a:outerShdw sx="100000" sy="100000" kx="0" ky="0" algn="bl" rotWithShape="0" blurRad="38100" dist="12700" dir="16200000">
+            <a:outerShdw blurRad="38100" dist="12700" dir="16200000" algn="bl" rotWithShape="0">
               <a:srgbClr val="000000">
                 <a:alpha val="5000"/>
               </a:srgbClr>
@@ -3637,13 +3605,12 @@
             <a:avLst/>
           </a:prstGeom>
           <a:noFill/>
-          <a:ln/>
-        </p:spPr>
-        <p:txBody>
-          <a:bodyPr wrap="square" rtlCol="0" anchor="ctr"/>
-          <a:lstStyle/>
-          <a:p>
-            <a:pPr indent="0" marL="0">
+        </p:spPr>
+        <p:txBody>
+          <a:bodyPr wrap="square" rtlCol="0" anchor="ctr"/>
+          <a:lstStyle/>
+          <a:p>
+            <a:pPr marL="0" indent="0">
               <a:buNone/>
             </a:pPr>
             <a:r>
@@ -3651,9 +3618,9 @@
                 <a:solidFill>
                   <a:srgbClr val="2B2B2B"/>
                 </a:solidFill>
-                <a:latin typeface="Arial" pitchFamily="34" charset="0"/>
-                <a:ea typeface="Arial" pitchFamily="34" charset="-122"/>
-                <a:cs typeface="Arial" pitchFamily="34" charset="-120"/>
+                <a:latin typeface="Arial" panose="020B0604020202020204" pitchFamily="34" charset="0"/>
+                <a:ea typeface="Arial" panose="020B0604020202020204" pitchFamily="34" charset="-122"/>
+                <a:cs typeface="Arial" panose="020B0604020202020204" pitchFamily="34" charset="-120"/>
               </a:rPr>
               <a:t>➕  加管子</a:t>
             </a:r>
@@ -3676,13 +3643,12 @@
             <a:avLst/>
           </a:prstGeom>
           <a:noFill/>
-          <a:ln/>
-        </p:spPr>
-        <p:txBody>
-          <a:bodyPr wrap="square" rtlCol="0" anchor="ctr"/>
-          <a:lstStyle/>
-          <a:p>
-            <a:pPr indent="0" marL="0">
+        </p:spPr>
+        <p:txBody>
+          <a:bodyPr wrap="square" rtlCol="0" anchor="ctr"/>
+          <a:lstStyle/>
+          <a:p>
+            <a:pPr marL="0" indent="0">
               <a:buNone/>
             </a:pPr>
             <a:r>
@@ -3690,9 +3656,9 @@
                 <a:solidFill>
                   <a:srgbClr val="7A7A7A"/>
                 </a:solidFill>
-                <a:latin typeface="Arial" pitchFamily="34" charset="0"/>
-                <a:ea typeface="Arial" pitchFamily="34" charset="-122"/>
-                <a:cs typeface="Arial" pitchFamily="34" charset="-120"/>
+                <a:latin typeface="Arial" panose="020B0604020202020204" pitchFamily="34" charset="0"/>
+                <a:ea typeface="Arial" panose="020B0604020202020204" pitchFamily="34" charset="-122"/>
+                <a:cs typeface="Arial" panose="020B0604020202020204" pitchFamily="34" charset="-120"/>
               </a:rPr>
               <a:t>卡关时随时加空管降低难度</a:t>
             </a:r>
@@ -3715,13 +3681,12 @@
             <a:avLst/>
           </a:prstGeom>
           <a:noFill/>
-          <a:ln/>
-        </p:spPr>
-        <p:txBody>
-          <a:bodyPr wrap="square" rtlCol="0" anchor="ctr"/>
-          <a:lstStyle/>
-          <a:p>
-            <a:pPr algn="ctr" indent="0" marL="0">
+        </p:spPr>
+        <p:txBody>
+          <a:bodyPr wrap="square" rtlCol="0" anchor="ctr"/>
+          <a:lstStyle/>
+          <a:p>
+            <a:pPr marL="0" indent="0" algn="ctr">
               <a:buNone/>
             </a:pPr>
             <a:r>
@@ -3746,12 +3711,13 @@
 
 <file path=ppt/slides/slide5.xml><?xml version="1.0" encoding="utf-8"?>
 <p:sld xmlns:a="http://schemas.openxmlformats.org/drawingml/2006/main" xmlns:r="http://schemas.openxmlformats.org/officeDocument/2006/relationships" xmlns:p="http://schemas.openxmlformats.org/presentationml/2006/main">
-  <p:cSld name="Slide 5">
+  <p:cSld>
     <p:bg>
       <p:bgPr>
         <a:solidFill>
           <a:srgbClr val="F7F5F0"/>
         </a:solidFill>
+        <a:effectLst/>
       </p:bgPr>
     </p:bg>
     <p:spTree>
@@ -3785,7 +3751,6 @@
           <a:solidFill>
             <a:srgbClr val="5BC0BE"/>
           </a:solidFill>
-          <a:ln/>
         </p:spPr>
       </p:sp>
       <p:sp>
@@ -3803,13 +3768,12 @@
             <a:avLst/>
           </a:prstGeom>
           <a:noFill/>
-          <a:ln/>
-        </p:spPr>
-        <p:txBody>
-          <a:bodyPr wrap="square" rtlCol="0" anchor="ctr"/>
-          <a:lstStyle/>
-          <a:p>
-            <a:pPr indent="0" marL="0">
+        </p:spPr>
+        <p:txBody>
+          <a:bodyPr wrap="square" rtlCol="0" anchor="ctr"/>
+          <a:lstStyle/>
+          <a:p>
+            <a:pPr marL="0" indent="0">
               <a:buNone/>
             </a:pPr>
             <a:r>
@@ -3817,9 +3781,9 @@
                 <a:solidFill>
                   <a:srgbClr val="2B2B2B"/>
                 </a:solidFill>
-                <a:latin typeface="Arial" pitchFamily="34" charset="0"/>
-                <a:ea typeface="Arial" pitchFamily="34" charset="-122"/>
-                <a:cs typeface="Arial" pitchFamily="34" charset="-120"/>
+                <a:latin typeface="Arial" panose="020B0604020202020204" pitchFamily="34" charset="0"/>
+                <a:ea typeface="Arial" panose="020B0604020202020204" pitchFamily="34" charset="-122"/>
+                <a:cs typeface="Arial" panose="020B0604020202020204" pitchFamily="34" charset="-120"/>
               </a:rPr>
               <a:t>视觉设计</a:t>
             </a:r>
@@ -3844,9 +3808,8 @@
           <a:solidFill>
             <a:srgbClr val="FFFFFF"/>
           </a:solidFill>
-          <a:ln/>
           <a:effectLst>
-            <a:outerShdw sx="100000" sy="100000" kx="0" ky="0" algn="bl" rotWithShape="0" blurRad="25400" dist="12700" dir="16200000">
+            <a:outerShdw blurRad="25400" dist="12700" dir="16200000" algn="bl" rotWithShape="0">
               <a:srgbClr val="000000">
                 <a:alpha val="4000"/>
               </a:srgbClr>
@@ -3869,13 +3832,12 @@
             <a:avLst/>
           </a:prstGeom>
           <a:noFill/>
-          <a:ln/>
-        </p:spPr>
-        <p:txBody>
-          <a:bodyPr wrap="square" rtlCol="0" anchor="ctr"/>
-          <a:lstStyle/>
-          <a:p>
-            <a:pPr indent="0" marL="0">
+        </p:spPr>
+        <p:txBody>
+          <a:bodyPr wrap="square" rtlCol="0" anchor="ctr"/>
+          <a:lstStyle/>
+          <a:p>
+            <a:pPr marL="0" indent="0">
               <a:buNone/>
             </a:pPr>
             <a:r>
@@ -3883,9 +3845,9 @@
                 <a:solidFill>
                   <a:srgbClr val="2B2B2B"/>
                 </a:solidFill>
-                <a:latin typeface="Arial" pitchFamily="34" charset="0"/>
-                <a:ea typeface="Arial" pitchFamily="34" charset="-122"/>
-                <a:cs typeface="Arial" pitchFamily="34" charset="-120"/>
+                <a:latin typeface="Arial" panose="020B0604020202020204" pitchFamily="34" charset="0"/>
+                <a:ea typeface="Arial" panose="020B0604020202020204" pitchFamily="34" charset="-122"/>
+                <a:cs typeface="Arial" panose="020B0604020202020204" pitchFamily="34" charset="-120"/>
               </a:rPr>
               <a:t>简约清新风格</a:t>
             </a:r>
@@ -3908,13 +3870,12 @@
             <a:avLst/>
           </a:prstGeom>
           <a:noFill/>
-          <a:ln/>
-        </p:spPr>
-        <p:txBody>
-          <a:bodyPr wrap="square" rtlCol="0" anchor="ctr"/>
-          <a:lstStyle/>
-          <a:p>
-            <a:pPr indent="0" marL="0">
+        </p:spPr>
+        <p:txBody>
+          <a:bodyPr wrap="square" rtlCol="0" anchor="ctr"/>
+          <a:lstStyle/>
+          <a:p>
+            <a:pPr marL="0" indent="0">
               <a:buNone/>
             </a:pPr>
             <a:r>
@@ -3922,9 +3883,9 @@
                 <a:solidFill>
                   <a:srgbClr val="7A7A7A"/>
                 </a:solidFill>
-                <a:latin typeface="Arial" pitchFamily="34" charset="0"/>
-                <a:ea typeface="Arial" pitchFamily="34" charset="-122"/>
-                <a:cs typeface="Arial" pitchFamily="34" charset="-120"/>
+                <a:latin typeface="Arial" panose="020B0604020202020204" pitchFamily="34" charset="0"/>
+                <a:ea typeface="Arial" panose="020B0604020202020204" pitchFamily="34" charset="-122"/>
+                <a:cs typeface="Arial" panose="020B0604020202020204" pitchFamily="34" charset="-120"/>
               </a:rPr>
               <a:t>暖白底色(#F7F5F0) + 柔和马卡龙色板(16色)，干净利落</a:t>
             </a:r>
@@ -3949,9 +3910,8 @@
           <a:solidFill>
             <a:srgbClr val="FFFFFF"/>
           </a:solidFill>
-          <a:ln/>
           <a:effectLst>
-            <a:outerShdw sx="100000" sy="100000" kx="0" ky="0" algn="bl" rotWithShape="0" blurRad="25400" dist="12700" dir="16200000">
+            <a:outerShdw blurRad="25400" dist="12700" dir="16200000" algn="bl" rotWithShape="0">
               <a:srgbClr val="000000">
                 <a:alpha val="4000"/>
               </a:srgbClr>
@@ -3974,13 +3934,12 @@
             <a:avLst/>
           </a:prstGeom>
           <a:noFill/>
-          <a:ln/>
-        </p:spPr>
-        <p:txBody>
-          <a:bodyPr wrap="square" rtlCol="0" anchor="ctr"/>
-          <a:lstStyle/>
-          <a:p>
-            <a:pPr indent="0" marL="0">
+        </p:spPr>
+        <p:txBody>
+          <a:bodyPr wrap="square" rtlCol="0" anchor="ctr"/>
+          <a:lstStyle/>
+          <a:p>
+            <a:pPr marL="0" indent="0">
               <a:buNone/>
             </a:pPr>
             <a:r>
@@ -3988,9 +3947,9 @@
                 <a:solidFill>
                   <a:srgbClr val="2B2B2B"/>
                 </a:solidFill>
-                <a:latin typeface="Arial" pitchFamily="34" charset="0"/>
-                <a:ea typeface="Arial" pitchFamily="34" charset="-122"/>
-                <a:cs typeface="Arial" pitchFamily="34" charset="-120"/>
+                <a:latin typeface="Arial" panose="020B0604020202020204" pitchFamily="34" charset="0"/>
+                <a:ea typeface="Arial" panose="020B0604020202020204" pitchFamily="34" charset="-122"/>
+                <a:cs typeface="Arial" panose="020B0604020202020204" pitchFamily="34" charset="-120"/>
               </a:rPr>
               <a:t>玻璃试管渲染</a:t>
             </a:r>
@@ -4013,13 +3972,12 @@
             <a:avLst/>
           </a:prstGeom>
           <a:noFill/>
-          <a:ln/>
-        </p:spPr>
-        <p:txBody>
-          <a:bodyPr wrap="square" rtlCol="0" anchor="ctr"/>
-          <a:lstStyle/>
-          <a:p>
-            <a:pPr indent="0" marL="0">
+        </p:spPr>
+        <p:txBody>
+          <a:bodyPr wrap="square" rtlCol="0" anchor="ctr"/>
+          <a:lstStyle/>
+          <a:p>
+            <a:pPr marL="0" indent="0">
               <a:buNone/>
             </a:pPr>
             <a:r>
@@ -4027,9 +3985,9 @@
                 <a:solidFill>
                   <a:srgbClr val="7A7A7A"/>
                 </a:solidFill>
-                <a:latin typeface="Arial" pitchFamily="34" charset="0"/>
-                <a:ea typeface="Arial" pitchFamily="34" charset="-122"/>
-                <a:cs typeface="Arial" pitchFamily="34" charset="-120"/>
+                <a:latin typeface="Arial" panose="020B0604020202020204" pitchFamily="34" charset="0"/>
+                <a:ea typeface="Arial" panose="020B0604020202020204" pitchFamily="34" charset="-122"/>
+                <a:cs typeface="Arial" panose="020B0604020202020204" pitchFamily="34" charset="-120"/>
               </a:rPr>
               <a:t>Canvas 手绘直壁圆底试管，玻璃高光 + 内壁反光 + 底座</a:t>
             </a:r>
@@ -4054,9 +4012,8 @@
           <a:solidFill>
             <a:srgbClr val="FFFFFF"/>
           </a:solidFill>
-          <a:ln/>
           <a:effectLst>
-            <a:outerShdw sx="100000" sy="100000" kx="0" ky="0" algn="bl" rotWithShape="0" blurRad="25400" dist="12700" dir="16200000">
+            <a:outerShdw blurRad="25400" dist="12700" dir="16200000" algn="bl" rotWithShape="0">
               <a:srgbClr val="000000">
                 <a:alpha val="4000"/>
               </a:srgbClr>
@@ -4079,13 +4036,12 @@
             <a:avLst/>
           </a:prstGeom>
           <a:noFill/>
-          <a:ln/>
-        </p:spPr>
-        <p:txBody>
-          <a:bodyPr wrap="square" rtlCol="0" anchor="ctr"/>
-          <a:lstStyle/>
-          <a:p>
-            <a:pPr indent="0" marL="0">
+        </p:spPr>
+        <p:txBody>
+          <a:bodyPr wrap="square" rtlCol="0" anchor="ctr"/>
+          <a:lstStyle/>
+          <a:p>
+            <a:pPr marL="0" indent="0">
               <a:buNone/>
             </a:pPr>
             <a:r>
@@ -4093,9 +4049,9 @@
                 <a:solidFill>
                   <a:srgbClr val="2B2B2B"/>
                 </a:solidFill>
-                <a:latin typeface="Arial" pitchFamily="34" charset="0"/>
-                <a:ea typeface="Arial" pitchFamily="34" charset="-122"/>
-                <a:cs typeface="Arial" pitchFamily="34" charset="-120"/>
+                <a:latin typeface="Arial" panose="020B0604020202020204" pitchFamily="34" charset="0"/>
+                <a:ea typeface="Arial" panose="020B0604020202020204" pitchFamily="34" charset="-122"/>
+                <a:cs typeface="Arial" panose="020B0604020202020204" pitchFamily="34" charset="-120"/>
               </a:rPr>
               <a:t>动态水面特效</a:t>
             </a:r>
@@ -4118,13 +4074,12 @@
             <a:avLst/>
           </a:prstGeom>
           <a:noFill/>
-          <a:ln/>
-        </p:spPr>
-        <p:txBody>
-          <a:bodyPr wrap="square" rtlCol="0" anchor="ctr"/>
-          <a:lstStyle/>
-          <a:p>
-            <a:pPr indent="0" marL="0">
+        </p:spPr>
+        <p:txBody>
+          <a:bodyPr wrap="square" rtlCol="0" anchor="ctr"/>
+          <a:lstStyle/>
+          <a:p>
+            <a:pPr marL="0" indent="0">
               <a:buNone/>
             </a:pPr>
             <a:r>
@@ -4132,9 +4087,9 @@
                 <a:solidFill>
                   <a:srgbClr val="7A7A7A"/>
                 </a:solidFill>
-                <a:latin typeface="Arial" pitchFamily="34" charset="0"/>
-                <a:ea typeface="Arial" pitchFamily="34" charset="-122"/>
-                <a:cs typeface="Arial" pitchFamily="34" charset="-120"/>
+                <a:latin typeface="Arial" panose="020B0604020202020204" pitchFamily="34" charset="0"/>
+                <a:ea typeface="Arial" panose="020B0604020202020204" pitchFamily="34" charset="-122"/>
+                <a:cs typeface="Arial" panose="020B0604020202020204" pitchFamily="34" charset="-120"/>
               </a:rPr>
               <a:t>正弦波浪水面 + 内部涟漪 + 侧面折射反光，借鉴 Cocos 实现</a:t>
             </a:r>
@@ -4159,9 +4114,8 @@
           <a:solidFill>
             <a:srgbClr val="FFFFFF"/>
           </a:solidFill>
-          <a:ln/>
           <a:effectLst>
-            <a:outerShdw sx="100000" sy="100000" kx="0" ky="0" algn="bl" rotWithShape="0" blurRad="25400" dist="12700" dir="16200000">
+            <a:outerShdw blurRad="25400" dist="12700" dir="16200000" algn="bl" rotWithShape="0">
               <a:srgbClr val="000000">
                 <a:alpha val="4000"/>
               </a:srgbClr>
@@ -4184,13 +4138,12 @@
             <a:avLst/>
           </a:prstGeom>
           <a:noFill/>
-          <a:ln/>
-        </p:spPr>
-        <p:txBody>
-          <a:bodyPr wrap="square" rtlCol="0" anchor="ctr"/>
-          <a:lstStyle/>
-          <a:p>
-            <a:pPr indent="0" marL="0">
+        </p:spPr>
+        <p:txBody>
+          <a:bodyPr wrap="square" rtlCol="0" anchor="ctr"/>
+          <a:lstStyle/>
+          <a:p>
+            <a:pPr marL="0" indent="0">
               <a:buNone/>
             </a:pPr>
             <a:r>
@@ -4198,9 +4151,9 @@
                 <a:solidFill>
                   <a:srgbClr val="2B2B2B"/>
                 </a:solidFill>
-                <a:latin typeface="Arial" pitchFamily="34" charset="0"/>
-                <a:ea typeface="Arial" pitchFamily="34" charset="-122"/>
-                <a:cs typeface="Arial" pitchFamily="34" charset="-120"/>
+                <a:latin typeface="Arial" panose="020B0604020202020204" pitchFamily="34" charset="0"/>
+                <a:ea typeface="Arial" panose="020B0604020202020204" pitchFamily="34" charset="-122"/>
+                <a:cs typeface="Arial" panose="020B0604020202020204" pitchFamily="34" charset="-120"/>
               </a:rPr>
               <a:t>四阶段倒水动画</a:t>
             </a:r>
@@ -4223,13 +4176,12 @@
             <a:avLst/>
           </a:prstGeom>
           <a:noFill/>
-          <a:ln/>
-        </p:spPr>
-        <p:txBody>
-          <a:bodyPr wrap="square" rtlCol="0" anchor="ctr"/>
-          <a:lstStyle/>
-          <a:p>
-            <a:pPr indent="0" marL="0">
+        </p:spPr>
+        <p:txBody>
+          <a:bodyPr wrap="square" rtlCol="0" anchor="ctr"/>
+          <a:lstStyle/>
+          <a:p>
+            <a:pPr marL="0" indent="0">
               <a:buNone/>
             </a:pPr>
             <a:r>
@@ -4237,9 +4189,9 @@
                 <a:solidFill>
                   <a:srgbClr val="7A7A7A"/>
                 </a:solidFill>
-                <a:latin typeface="Arial" pitchFamily="34" charset="0"/>
-                <a:ea typeface="Arial" pitchFamily="34" charset="-122"/>
-                <a:cs typeface="Arial" pitchFamily="34" charset="-120"/>
+                <a:latin typeface="Arial" panose="020B0604020202020204" pitchFamily="34" charset="0"/>
+                <a:ea typeface="Arial" panose="020B0604020202020204" pitchFamily="34" charset="-122"/>
+                <a:cs typeface="Arial" panose="020B0604020202020204" pitchFamily="34" charset="-120"/>
               </a:rPr>
               <a:t>移动→倾斜倒水→回正→归位，水流/液滴/飞溅/波纹全程绘制</a:t>
             </a:r>
@@ -4264,9 +4216,8 @@
           <a:solidFill>
             <a:srgbClr val="FFFFFF"/>
           </a:solidFill>
-          <a:ln/>
           <a:effectLst>
-            <a:outerShdw sx="100000" sy="100000" kx="0" ky="0" algn="bl" rotWithShape="0" blurRad="25400" dist="12700" dir="16200000">
+            <a:outerShdw blurRad="25400" dist="12700" dir="16200000" algn="bl" rotWithShape="0">
               <a:srgbClr val="000000">
                 <a:alpha val="4000"/>
               </a:srgbClr>
@@ -4289,13 +4240,12 @@
             <a:avLst/>
           </a:prstGeom>
           <a:noFill/>
-          <a:ln/>
-        </p:spPr>
-        <p:txBody>
-          <a:bodyPr wrap="square" rtlCol="0" anchor="ctr"/>
-          <a:lstStyle/>
-          <a:p>
-            <a:pPr indent="0" marL="0">
+        </p:spPr>
+        <p:txBody>
+          <a:bodyPr wrap="square" rtlCol="0" anchor="ctr"/>
+          <a:lstStyle/>
+          <a:p>
+            <a:pPr marL="0" indent="0">
               <a:buNone/>
             </a:pPr>
             <a:r>
@@ -4303,9 +4253,9 @@
                 <a:solidFill>
                   <a:srgbClr val="2B2B2B"/>
                 </a:solidFill>
-                <a:latin typeface="Arial" pitchFamily="34" charset="0"/>
-                <a:ea typeface="Arial" pitchFamily="34" charset="-122"/>
-                <a:cs typeface="Arial" pitchFamily="34" charset="-120"/>
+                <a:latin typeface="Arial" panose="020B0604020202020204" pitchFamily="34" charset="0"/>
+                <a:ea typeface="Arial" panose="020B0604020202020204" pitchFamily="34" charset="-122"/>
+                <a:cs typeface="Arial" panose="020B0604020202020204" pitchFamily="34" charset="-120"/>
               </a:rPr>
               <a:t>盲盒彩虹流彩</a:t>
             </a:r>
@@ -4328,13 +4278,12 @@
             <a:avLst/>
           </a:prstGeom>
           <a:noFill/>
-          <a:ln/>
-        </p:spPr>
-        <p:txBody>
-          <a:bodyPr wrap="square" rtlCol="0" anchor="ctr"/>
-          <a:lstStyle/>
-          <a:p>
-            <a:pPr indent="0" marL="0">
+        </p:spPr>
+        <p:txBody>
+          <a:bodyPr wrap="square" rtlCol="0" anchor="ctr"/>
+          <a:lstStyle/>
+          <a:p>
+            <a:pPr marL="0" indent="0">
               <a:buNone/>
             </a:pPr>
             <a:r>
@@ -4342,9 +4291,9 @@
                 <a:solidFill>
                   <a:srgbClr val="7A7A7A"/>
                 </a:solidFill>
-                <a:latin typeface="Arial" pitchFamily="34" charset="0"/>
-                <a:ea typeface="Arial" pitchFamily="34" charset="-122"/>
-                <a:cs typeface="Arial" pitchFamily="34" charset="-120"/>
+                <a:latin typeface="Arial" panose="020B0604020202020204" pitchFamily="34" charset="0"/>
+                <a:ea typeface="Arial" panose="020B0604020202020204" pitchFamily="34" charset="-122"/>
+                <a:cs typeface="Arial" panose="020B0604020202020204" pitchFamily="34" charset="-120"/>
               </a:rPr>
               <a:t>隐藏层用 HSL 全色相循环渐变 + ? 标记，随时间流动</a:t>
             </a:r>
@@ -4369,9 +4318,8 @@
           <a:solidFill>
             <a:srgbClr val="FFFFFF"/>
           </a:solidFill>
-          <a:ln/>
           <a:effectLst>
-            <a:outerShdw sx="100000" sy="100000" kx="0" ky="0" algn="bl" rotWithShape="0" blurRad="25400" dist="12700" dir="16200000">
+            <a:outerShdw blurRad="25400" dist="12700" dir="16200000" algn="bl" rotWithShape="0">
               <a:srgbClr val="000000">
                 <a:alpha val="4000"/>
               </a:srgbClr>
@@ -4394,13 +4342,12 @@
             <a:avLst/>
           </a:prstGeom>
           <a:noFill/>
-          <a:ln/>
-        </p:spPr>
-        <p:txBody>
-          <a:bodyPr wrap="square" rtlCol="0" anchor="ctr"/>
-          <a:lstStyle/>
-          <a:p>
-            <a:pPr indent="0" marL="0">
+        </p:spPr>
+        <p:txBody>
+          <a:bodyPr wrap="square" rtlCol="0" anchor="ctr"/>
+          <a:lstStyle/>
+          <a:p>
+            <a:pPr marL="0" indent="0">
               <a:buNone/>
             </a:pPr>
             <a:r>
@@ -4408,9 +4355,9 @@
                 <a:solidFill>
                   <a:srgbClr val="2B2B2B"/>
                 </a:solidFill>
-                <a:latin typeface="Arial" pitchFamily="34" charset="0"/>
-                <a:ea typeface="Arial" pitchFamily="34" charset="-122"/>
-                <a:cs typeface="Arial" pitchFamily="34" charset="-120"/>
+                <a:latin typeface="Arial" panose="020B0604020202020204" pitchFamily="34" charset="0"/>
+                <a:ea typeface="Arial" panose="020B0604020202020204" pitchFamily="34" charset="-122"/>
+                <a:cs typeface="Arial" panose="020B0604020202020204" pitchFamily="34" charset="-120"/>
               </a:rPr>
               <a:t>瓶盖 + 浮空选中</a:t>
             </a:r>
@@ -4433,13 +4380,12 @@
             <a:avLst/>
           </a:prstGeom>
           <a:noFill/>
-          <a:ln/>
-        </p:spPr>
-        <p:txBody>
-          <a:bodyPr wrap="square" rtlCol="0" anchor="ctr"/>
-          <a:lstStyle/>
-          <a:p>
-            <a:pPr indent="0" marL="0">
+        </p:spPr>
+        <p:txBody>
+          <a:bodyPr wrap="square" rtlCol="0" anchor="ctr"/>
+          <a:lstStyle/>
+          <a:p>
+            <a:pPr marL="0" indent="0">
               <a:buNone/>
             </a:pPr>
             <a:r>
@@ -4447,9 +4393,9 @@
                 <a:solidFill>
                   <a:srgbClr val="7A7A7A"/>
                 </a:solidFill>
-                <a:latin typeface="Arial" pitchFamily="34" charset="0"/>
-                <a:ea typeface="Arial" pitchFamily="34" charset="-122"/>
-                <a:cs typeface="Arial" pitchFamily="34" charset="-120"/>
+                <a:latin typeface="Arial" panose="020B0604020202020204" pitchFamily="34" charset="0"/>
+                <a:ea typeface="Arial" panose="020B0604020202020204" pitchFamily="34" charset="-122"/>
+                <a:cs typeface="Arial" panose="020B0604020202020204" pitchFamily="34" charset="-120"/>
               </a:rPr>
               <a:t>完成即盖金色瓶盖，选中试管上浮 7px + 暖色光晕</a:t>
             </a:r>
@@ -4472,13 +4418,12 @@
             <a:avLst/>
           </a:prstGeom>
           <a:noFill/>
-          <a:ln/>
-        </p:spPr>
-        <p:txBody>
-          <a:bodyPr wrap="square" rtlCol="0" anchor="ctr"/>
-          <a:lstStyle/>
-          <a:p>
-            <a:pPr algn="ctr" indent="0" marL="0">
+        </p:spPr>
+        <p:txBody>
+          <a:bodyPr wrap="square" rtlCol="0" anchor="ctr"/>
+          <a:lstStyle/>
+          <a:p>
+            <a:pPr marL="0" indent="0" algn="ctr">
               <a:buNone/>
             </a:pPr>
             <a:r>
@@ -4503,12 +4448,13 @@
 
 <file path=ppt/slides/slide6.xml><?xml version="1.0" encoding="utf-8"?>
 <p:sld xmlns:a="http://schemas.openxmlformats.org/drawingml/2006/main" xmlns:r="http://schemas.openxmlformats.org/officeDocument/2006/relationships" xmlns:p="http://schemas.openxmlformats.org/presentationml/2006/main">
-  <p:cSld name="Slide 6">
+  <p:cSld>
     <p:bg>
       <p:bgPr>
         <a:solidFill>
           <a:srgbClr val="F7F5F0"/>
         </a:solidFill>
+        <a:effectLst/>
       </p:bgPr>
     </p:bg>
     <p:spTree>
@@ -4542,7 +4488,6 @@
           <a:solidFill>
             <a:srgbClr val="D4A853"/>
           </a:solidFill>
-          <a:ln/>
         </p:spPr>
       </p:sp>
       <p:sp>
@@ -4560,13 +4505,12 @@
             <a:avLst/>
           </a:prstGeom>
           <a:noFill/>
-          <a:ln/>
-        </p:spPr>
-        <p:txBody>
-          <a:bodyPr wrap="square" rtlCol="0" anchor="ctr"/>
-          <a:lstStyle/>
-          <a:p>
-            <a:pPr indent="0" marL="0">
+        </p:spPr>
+        <p:txBody>
+          <a:bodyPr wrap="square" rtlCol="0" anchor="ctr"/>
+          <a:lstStyle/>
+          <a:p>
+            <a:pPr marL="0" indent="0">
               <a:buNone/>
             </a:pPr>
             <a:r>
@@ -4574,9 +4518,9 @@
                 <a:solidFill>
                   <a:srgbClr val="2B2B2B"/>
                 </a:solidFill>
-                <a:latin typeface="Arial" pitchFamily="34" charset="0"/>
-                <a:ea typeface="Arial" pitchFamily="34" charset="-122"/>
-                <a:cs typeface="Arial" pitchFamily="34" charset="-120"/>
+                <a:latin typeface="Arial" panose="020B0604020202020204" pitchFamily="34" charset="0"/>
+                <a:ea typeface="Arial" panose="020B0604020202020204" pitchFamily="34" charset="-122"/>
+                <a:cs typeface="Arial" panose="020B0604020202020204" pitchFamily="34" charset="-120"/>
               </a:rPr>
               <a:t>技术架构</a:t>
             </a:r>
@@ -4601,7 +4545,6 @@
           <a:solidFill>
             <a:srgbClr val="E8D5B0"/>
           </a:solidFill>
-          <a:ln/>
         </p:spPr>
       </p:sp>
       <p:sp>
@@ -4619,13 +4562,12 @@
             <a:avLst/>
           </a:prstGeom>
           <a:noFill/>
-          <a:ln/>
-        </p:spPr>
-        <p:txBody>
-          <a:bodyPr wrap="square" rtlCol="0" anchor="ctr"/>
-          <a:lstStyle/>
-          <a:p>
-            <a:pPr algn="ctr" indent="0" marL="0">
+        </p:spPr>
+        <p:txBody>
+          <a:bodyPr wrap="square" rtlCol="0" anchor="ctr"/>
+          <a:lstStyle/>
+          <a:p>
+            <a:pPr marL="0" indent="0" algn="ctr">
               <a:buNone/>
             </a:pPr>
             <a:r>
@@ -4633,9 +4575,9 @@
                 <a:solidFill>
                   <a:srgbClr val="2B2B2B"/>
                 </a:solidFill>
-                <a:latin typeface="Arial" pitchFamily="34" charset="0"/>
-                <a:ea typeface="Arial" pitchFamily="34" charset="-122"/>
-                <a:cs typeface="Arial" pitchFamily="34" charset="-120"/>
+                <a:latin typeface="Arial" panose="020B0604020202020204" pitchFamily="34" charset="0"/>
+                <a:ea typeface="Arial" panose="020B0604020202020204" pitchFamily="34" charset="-122"/>
+                <a:cs typeface="Arial" panose="020B0604020202020204" pitchFamily="34" charset="-120"/>
               </a:rPr>
               <a:t>渲染层</a:t>
             </a:r>
@@ -4658,13 +4600,12 @@
             <a:avLst/>
           </a:prstGeom>
           <a:noFill/>
-          <a:ln/>
-        </p:spPr>
-        <p:txBody>
-          <a:bodyPr wrap="square" rtlCol="0" anchor="ctr"/>
-          <a:lstStyle/>
-          <a:p>
-            <a:pPr indent="0" marL="0">
+        </p:spPr>
+        <p:txBody>
+          <a:bodyPr wrap="square" rtlCol="0" anchor="ctr"/>
+          <a:lstStyle/>
+          <a:p>
+            <a:pPr marL="0" indent="0">
               <a:buNone/>
             </a:pPr>
             <a:r>
@@ -4672,9 +4613,9 @@
                 <a:solidFill>
                   <a:srgbClr val="2B2B2B"/>
                 </a:solidFill>
-                <a:latin typeface="Arial" pitchFamily="34" charset="0"/>
-                <a:ea typeface="Arial" pitchFamily="34" charset="-122"/>
-                <a:cs typeface="Arial" pitchFamily="34" charset="-120"/>
+                <a:latin typeface="Arial" panose="020B0604020202020204" pitchFamily="34" charset="0"/>
+                <a:ea typeface="Arial" panose="020B0604020202020204" pitchFamily="34" charset="-122"/>
+                <a:cs typeface="Arial" panose="020B0604020202020204" pitchFamily="34" charset="-120"/>
               </a:rPr>
               <a:t>Canvas 2D · 自绘玻璃管 · 水特效 · 动画系统 · 拖拽交互</a:t>
             </a:r>
@@ -4699,7 +4640,6 @@
           <a:solidFill>
             <a:srgbClr val="C8DCC8"/>
           </a:solidFill>
-          <a:ln/>
         </p:spPr>
       </p:sp>
       <p:sp>
@@ -4717,13 +4657,12 @@
             <a:avLst/>
           </a:prstGeom>
           <a:noFill/>
-          <a:ln/>
-        </p:spPr>
-        <p:txBody>
-          <a:bodyPr wrap="square" rtlCol="0" anchor="ctr"/>
-          <a:lstStyle/>
-          <a:p>
-            <a:pPr algn="ctr" indent="0" marL="0">
+        </p:spPr>
+        <p:txBody>
+          <a:bodyPr wrap="square" rtlCol="0" anchor="ctr"/>
+          <a:lstStyle/>
+          <a:p>
+            <a:pPr marL="0" indent="0" algn="ctr">
               <a:buNone/>
             </a:pPr>
             <a:r>
@@ -4731,9 +4670,9 @@
                 <a:solidFill>
                   <a:srgbClr val="2B2B2B"/>
                 </a:solidFill>
-                <a:latin typeface="Arial" pitchFamily="34" charset="0"/>
-                <a:ea typeface="Arial" pitchFamily="34" charset="-122"/>
-                <a:cs typeface="Arial" pitchFamily="34" charset="-120"/>
+                <a:latin typeface="Arial" panose="020B0604020202020204" pitchFamily="34" charset="0"/>
+                <a:ea typeface="Arial" panose="020B0604020202020204" pitchFamily="34" charset="-122"/>
+                <a:cs typeface="Arial" panose="020B0604020202020204" pitchFamily="34" charset="-120"/>
               </a:rPr>
               <a:t>逻辑层</a:t>
             </a:r>
@@ -4756,13 +4695,12 @@
             <a:avLst/>
           </a:prstGeom>
           <a:noFill/>
-          <a:ln/>
-        </p:spPr>
-        <p:txBody>
-          <a:bodyPr wrap="square" rtlCol="0" anchor="ctr"/>
-          <a:lstStyle/>
-          <a:p>
-            <a:pPr indent="0" marL="0">
+        </p:spPr>
+        <p:txBody>
+          <a:bodyPr wrap="square" rtlCol="0" anchor="ctr"/>
+          <a:lstStyle/>
+          <a:p>
+            <a:pPr marL="0" indent="0">
               <a:buNone/>
             </a:pPr>
             <a:r>
@@ -4770,9 +4708,9 @@
                 <a:solidFill>
                   <a:srgbClr val="2B2B2B"/>
                 </a:solidFill>
-                <a:latin typeface="Arial" pitchFamily="34" charset="0"/>
-                <a:ea typeface="Arial" pitchFamily="34" charset="-122"/>
-                <a:cs typeface="Arial" pitchFamily="34" charset="-120"/>
+                <a:latin typeface="Arial" panose="020B0604020202020204" pitchFamily="34" charset="0"/>
+                <a:ea typeface="Arial" panose="020B0604020202020204" pitchFamily="34" charset="-122"/>
+                <a:cs typeface="Arial" panose="020B0604020202020204" pitchFamily="34" charset="-120"/>
               </a:rPr>
               <a:t>倒水验证 · 撤销栈 · 通关检测 · 瓶盖判定 · 盲盒揭示</a:t>
             </a:r>
@@ -4797,7 +4735,6 @@
           <a:solidFill>
             <a:srgbClr val="C8D0E8"/>
           </a:solidFill>
-          <a:ln/>
         </p:spPr>
       </p:sp>
       <p:sp>
@@ -4815,13 +4752,12 @@
             <a:avLst/>
           </a:prstGeom>
           <a:noFill/>
-          <a:ln/>
-        </p:spPr>
-        <p:txBody>
-          <a:bodyPr wrap="square" rtlCol="0" anchor="ctr"/>
-          <a:lstStyle/>
-          <a:p>
-            <a:pPr algn="ctr" indent="0" marL="0">
+        </p:spPr>
+        <p:txBody>
+          <a:bodyPr wrap="square" rtlCol="0" anchor="ctr"/>
+          <a:lstStyle/>
+          <a:p>
+            <a:pPr marL="0" indent="0" algn="ctr">
               <a:buNone/>
             </a:pPr>
             <a:r>
@@ -4829,9 +4765,9 @@
                 <a:solidFill>
                   <a:srgbClr val="2B2B2B"/>
                 </a:solidFill>
-                <a:latin typeface="Arial" pitchFamily="34" charset="0"/>
-                <a:ea typeface="Arial" pitchFamily="34" charset="-122"/>
-                <a:cs typeface="Arial" pitchFamily="34" charset="-120"/>
+                <a:latin typeface="Arial" panose="020B0604020202020204" pitchFamily="34" charset="0"/>
+                <a:ea typeface="Arial" panose="020B0604020202020204" pitchFamily="34" charset="-122"/>
+                <a:cs typeface="Arial" panose="020B0604020202020204" pitchFamily="34" charset="-120"/>
               </a:rPr>
               <a:t>数据层</a:t>
             </a:r>
@@ -4854,13 +4790,12 @@
             <a:avLst/>
           </a:prstGeom>
           <a:noFill/>
-          <a:ln/>
-        </p:spPr>
-        <p:txBody>
-          <a:bodyPr wrap="square" rtlCol="0" anchor="ctr"/>
-          <a:lstStyle/>
-          <a:p>
-            <a:pPr indent="0" marL="0">
+        </p:spPr>
+        <p:txBody>
+          <a:bodyPr wrap="square" rtlCol="0" anchor="ctr"/>
+          <a:lstStyle/>
+          <a:p>
+            <a:pPr marL="0" indent="0">
               <a:buNone/>
             </a:pPr>
             <a:r>
@@ -4868,9 +4803,9 @@
                 <a:solidFill>
                   <a:srgbClr val="2B2B2B"/>
                 </a:solidFill>
-                <a:latin typeface="Arial" pitchFamily="34" charset="0"/>
-                <a:ea typeface="Arial" pitchFamily="34" charset="-122"/>
-                <a:cs typeface="Arial" pitchFamily="34" charset="-120"/>
+                <a:latin typeface="Arial" panose="020B0604020202020204" pitchFamily="34" charset="0"/>
+                <a:ea typeface="Arial" panose="020B0604020202020204" pitchFamily="34" charset="-122"/>
+                <a:cs typeface="Arial" panose="020B0604020202020204" pitchFamily="34" charset="-120"/>
               </a:rPr>
               <a:t>关卡生成(反向构造) · DFS可解性检测 · localStorage存储</a:t>
             </a:r>
@@ -4895,7 +4830,6 @@
           <a:solidFill>
             <a:srgbClr val="E8D0D0"/>
           </a:solidFill>
-          <a:ln/>
         </p:spPr>
       </p:sp>
       <p:sp>
@@ -4913,13 +4847,12 @@
             <a:avLst/>
           </a:prstGeom>
           <a:noFill/>
-          <a:ln/>
-        </p:spPr>
-        <p:txBody>
-          <a:bodyPr wrap="square" rtlCol="0" anchor="ctr"/>
-          <a:lstStyle/>
-          <a:p>
-            <a:pPr algn="ctr" indent="0" marL="0">
+        </p:spPr>
+        <p:txBody>
+          <a:bodyPr wrap="square" rtlCol="0" anchor="ctr"/>
+          <a:lstStyle/>
+          <a:p>
+            <a:pPr marL="0" indent="0" algn="ctr">
               <a:buNone/>
             </a:pPr>
             <a:r>
@@ -4927,9 +4860,9 @@
                 <a:solidFill>
                   <a:srgbClr val="2B2B2B"/>
                 </a:solidFill>
-                <a:latin typeface="Arial" pitchFamily="34" charset="0"/>
-                <a:ea typeface="Arial" pitchFamily="34" charset="-122"/>
-                <a:cs typeface="Arial" pitchFamily="34" charset="-120"/>
+                <a:latin typeface="Arial" panose="020B0604020202020204" pitchFamily="34" charset="0"/>
+                <a:ea typeface="Arial" panose="020B0604020202020204" pitchFamily="34" charset="-122"/>
+                <a:cs typeface="Arial" panose="020B0604020202020204" pitchFamily="34" charset="-120"/>
               </a:rPr>
               <a:t>音效层</a:t>
             </a:r>
@@ -4952,13 +4885,12 @@
             <a:avLst/>
           </a:prstGeom>
           <a:noFill/>
-          <a:ln/>
-        </p:spPr>
-        <p:txBody>
-          <a:bodyPr wrap="square" rtlCol="0" anchor="ctr"/>
-          <a:lstStyle/>
-          <a:p>
-            <a:pPr indent="0" marL="0">
+        </p:spPr>
+        <p:txBody>
+          <a:bodyPr wrap="square" rtlCol="0" anchor="ctr"/>
+          <a:lstStyle/>
+          <a:p>
+            <a:pPr marL="0" indent="0">
               <a:buNone/>
             </a:pPr>
             <a:r>
@@ -4966,9 +4898,9 @@
                 <a:solidFill>
                   <a:srgbClr val="2B2B2B"/>
                 </a:solidFill>
-                <a:latin typeface="Arial" pitchFamily="34" charset="0"/>
-                <a:ea typeface="Arial" pitchFamily="34" charset="-122"/>
-                <a:cs typeface="Arial" pitchFamily="34" charset="-120"/>
+                <a:latin typeface="Arial" panose="020B0604020202020204" pitchFamily="34" charset="0"/>
+                <a:ea typeface="Arial" panose="020B0604020202020204" pitchFamily="34" charset="-122"/>
+                <a:cs typeface="Arial" panose="020B0604020202020204" pitchFamily="34" charset="-120"/>
               </a:rPr>
               <a:t>Web Audio API 合成倒水声 · 无外部音频依赖</a:t>
             </a:r>
@@ -4993,9 +4925,8 @@
           <a:solidFill>
             <a:srgbClr val="FFFFFF"/>
           </a:solidFill>
-          <a:ln/>
           <a:effectLst>
-            <a:outerShdw sx="100000" sy="100000" kx="0" ky="0" algn="bl" rotWithShape="0" blurRad="25400" dist="12700" dir="16200000">
+            <a:outerShdw blurRad="25400" dist="12700" dir="16200000" algn="bl" rotWithShape="0">
               <a:srgbClr val="000000">
                 <a:alpha val="4000"/>
               </a:srgbClr>
@@ -5018,13 +4949,12 @@
             <a:avLst/>
           </a:prstGeom>
           <a:noFill/>
-          <a:ln/>
-        </p:spPr>
-        <p:txBody>
-          <a:bodyPr wrap="square" rtlCol="0" anchor="ctr"/>
-          <a:lstStyle/>
-          <a:p>
-            <a:pPr indent="0" marL="0">
+        </p:spPr>
+        <p:txBody>
+          <a:bodyPr wrap="square" rtlCol="0" anchor="ctr"/>
+          <a:lstStyle/>
+          <a:p>
+            <a:pPr marL="0" indent="0">
               <a:buNone/>
             </a:pPr>
             <a:r>
@@ -5032,9 +4962,9 @@
                 <a:solidFill>
                   <a:srgbClr val="2B2B2B"/>
                 </a:solidFill>
-                <a:latin typeface="Arial" pitchFamily="34" charset="0"/>
-                <a:ea typeface="Arial" pitchFamily="34" charset="-122"/>
-                <a:cs typeface="Arial" pitchFamily="34" charset="-120"/>
+                <a:latin typeface="Arial" panose="020B0604020202020204" pitchFamily="34" charset="0"/>
+                <a:ea typeface="Arial" panose="020B0604020202020204" pitchFamily="34" charset="-122"/>
+                <a:cs typeface="Arial" panose="020B0604020202020204" pitchFamily="34" charset="-120"/>
               </a:rPr>
               <a:t>技术亮点：单文件 HTML · 纯 JavaScript · 零依赖 · 1400+ 行 · 兼容所有现代浏览器 · 支持触摸和鼠标</a:t>
             </a:r>
@@ -5057,13 +4987,12 @@
             <a:avLst/>
           </a:prstGeom>
           <a:noFill/>
-          <a:ln/>
-        </p:spPr>
-        <p:txBody>
-          <a:bodyPr wrap="square" rtlCol="0" anchor="ctr"/>
-          <a:lstStyle/>
-          <a:p>
-            <a:pPr algn="ctr" indent="0" marL="0">
+        </p:spPr>
+        <p:txBody>
+          <a:bodyPr wrap="square" rtlCol="0" anchor="ctr"/>
+          <a:lstStyle/>
+          <a:p>
+            <a:pPr marL="0" indent="0" algn="ctr">
               <a:buNone/>
             </a:pPr>
             <a:r>
@@ -5088,12 +5017,13 @@
 
 <file path=ppt/slides/slide7.xml><?xml version="1.0" encoding="utf-8"?>
 <p:sld xmlns:a="http://schemas.openxmlformats.org/drawingml/2006/main" xmlns:r="http://schemas.openxmlformats.org/officeDocument/2006/relationships" xmlns:p="http://schemas.openxmlformats.org/presentationml/2006/main">
-  <p:cSld name="Slide 7">
+  <p:cSld>
     <p:bg>
       <p:bgPr>
         <a:solidFill>
           <a:srgbClr val="F7F5F0"/>
         </a:solidFill>
+        <a:effectLst/>
       </p:bgPr>
     </p:bg>
     <p:spTree>
@@ -5127,7 +5057,6 @@
           <a:solidFill>
             <a:srgbClr val="5BC0BE"/>
           </a:solidFill>
-          <a:ln/>
         </p:spPr>
       </p:sp>
       <p:sp>
@@ -5145,13 +5074,12 @@
             <a:avLst/>
           </a:prstGeom>
           <a:noFill/>
-          <a:ln/>
-        </p:spPr>
-        <p:txBody>
-          <a:bodyPr wrap="square" rtlCol="0" anchor="ctr"/>
-          <a:lstStyle/>
-          <a:p>
-            <a:pPr indent="0" marL="0">
+        </p:spPr>
+        <p:txBody>
+          <a:bodyPr wrap="square" rtlCol="0" anchor="ctr"/>
+          <a:lstStyle/>
+          <a:p>
+            <a:pPr marL="0" indent="0">
               <a:buNone/>
             </a:pPr>
             <a:r>
@@ -5159,9 +5087,9 @@
                 <a:solidFill>
                   <a:srgbClr val="2B2B2B"/>
                 </a:solidFill>
-                <a:latin typeface="Arial" pitchFamily="34" charset="0"/>
-                <a:ea typeface="Arial" pitchFamily="34" charset="-122"/>
-                <a:cs typeface="Arial" pitchFamily="34" charset="-120"/>
+                <a:latin typeface="Arial" panose="020B0604020202020204" pitchFamily="34" charset="0"/>
+                <a:ea typeface="Arial" panose="020B0604020202020204" pitchFamily="34" charset="-122"/>
+                <a:cs typeface="Arial" panose="020B0604020202020204" pitchFamily="34" charset="-120"/>
               </a:rPr>
               <a:t>创新点</a:t>
             </a:r>
@@ -5186,7 +5114,6 @@
           <a:solidFill>
             <a:srgbClr val="D4A853"/>
           </a:solidFill>
-          <a:ln/>
         </p:spPr>
       </p:sp>
       <p:sp>
@@ -5204,13 +5131,12 @@
             <a:avLst/>
           </a:prstGeom>
           <a:noFill/>
-          <a:ln/>
-        </p:spPr>
-        <p:txBody>
-          <a:bodyPr wrap="square" rtlCol="0" anchor="ctr"/>
-          <a:lstStyle/>
-          <a:p>
-            <a:pPr algn="ctr" indent="0" marL="0">
+        </p:spPr>
+        <p:txBody>
+          <a:bodyPr wrap="square" rtlCol="0" anchor="ctr"/>
+          <a:lstStyle/>
+          <a:p>
+            <a:pPr marL="0" indent="0" algn="ctr">
               <a:buNone/>
             </a:pPr>
             <a:r>
@@ -5218,9 +5144,9 @@
                 <a:solidFill>
                   <a:srgbClr val="FFFFFF"/>
                 </a:solidFill>
-                <a:latin typeface="Arial" pitchFamily="34" charset="0"/>
-                <a:ea typeface="Arial" pitchFamily="34" charset="-122"/>
-                <a:cs typeface="Arial" pitchFamily="34" charset="-120"/>
+                <a:latin typeface="Arial" panose="020B0604020202020204" pitchFamily="34" charset="0"/>
+                <a:ea typeface="Arial" panose="020B0604020202020204" pitchFamily="34" charset="-122"/>
+                <a:cs typeface="Arial" panose="020B0604020202020204" pitchFamily="34" charset="-120"/>
               </a:rPr>
               <a:t>01</a:t>
             </a:r>
@@ -5243,13 +5169,12 @@
             <a:avLst/>
           </a:prstGeom>
           <a:noFill/>
-          <a:ln/>
-        </p:spPr>
-        <p:txBody>
-          <a:bodyPr wrap="square" rtlCol="0" anchor="ctr"/>
-          <a:lstStyle/>
-          <a:p>
-            <a:pPr indent="0" marL="0">
+        </p:spPr>
+        <p:txBody>
+          <a:bodyPr wrap="square" rtlCol="0" anchor="ctr"/>
+          <a:lstStyle/>
+          <a:p>
+            <a:pPr marL="0" indent="0">
               <a:buNone/>
             </a:pPr>
             <a:r>
@@ -5257,9 +5182,9 @@
                 <a:solidFill>
                   <a:srgbClr val="2B2B2B"/>
                 </a:solidFill>
-                <a:latin typeface="Arial" pitchFamily="34" charset="0"/>
-                <a:ea typeface="Arial" pitchFamily="34" charset="-122"/>
-                <a:cs typeface="Arial" pitchFamily="34" charset="-120"/>
+                <a:latin typeface="Arial" panose="020B0604020202020204" pitchFamily="34" charset="0"/>
+                <a:ea typeface="Arial" panose="020B0604020202020204" pitchFamily="34" charset="-122"/>
+                <a:cs typeface="Arial" panose="020B0604020202020204" pitchFamily="34" charset="-120"/>
               </a:rPr>
               <a:t>反向构造关卡生成</a:t>
             </a:r>
@@ -5282,13 +5207,12 @@
             <a:avLst/>
           </a:prstGeom>
           <a:noFill/>
-          <a:ln/>
         </p:spPr>
         <p:txBody>
           <a:bodyPr wrap="square" rtlCol="0" anchor="t"/>
           <a:lstStyle/>
           <a:p>
-            <a:pPr indent="0" marL="0">
+            <a:pPr marL="0" indent="0">
               <a:buNone/>
             </a:pPr>
             <a:r>
@@ -5296,9 +5220,9 @@
                 <a:solidFill>
                   <a:srgbClr val="7A7A7A"/>
                 </a:solidFill>
-                <a:latin typeface="Arial" pitchFamily="34" charset="0"/>
-                <a:ea typeface="Arial" pitchFamily="34" charset="-122"/>
-                <a:cs typeface="Arial" pitchFamily="34" charset="-120"/>
+                <a:latin typeface="Arial" panose="020B0604020202020204" pitchFamily="34" charset="0"/>
+                <a:ea typeface="Arial" panose="020B0604020202020204" pitchFamily="34" charset="-122"/>
+                <a:cs typeface="Arial" panose="020B0604020202020204" pitchFamily="34" charset="-120"/>
               </a:rPr>
               <a:t>从已解状态做随机合法倒水搅乱，天然保证有解，无需事后验证。1空管极限模式同样适用。</a:t>
             </a:r>
@@ -5323,7 +5247,6 @@
           <a:solidFill>
             <a:srgbClr val="D4A853"/>
           </a:solidFill>
-          <a:ln/>
         </p:spPr>
       </p:sp>
       <p:sp>
@@ -5341,13 +5264,12 @@
             <a:avLst/>
           </a:prstGeom>
           <a:noFill/>
-          <a:ln/>
-        </p:spPr>
-        <p:txBody>
-          <a:bodyPr wrap="square" rtlCol="0" anchor="ctr"/>
-          <a:lstStyle/>
-          <a:p>
-            <a:pPr algn="ctr" indent="0" marL="0">
+        </p:spPr>
+        <p:txBody>
+          <a:bodyPr wrap="square" rtlCol="0" anchor="ctr"/>
+          <a:lstStyle/>
+          <a:p>
+            <a:pPr marL="0" indent="0" algn="ctr">
               <a:buNone/>
             </a:pPr>
             <a:r>
@@ -5355,9 +5277,9 @@
                 <a:solidFill>
                   <a:srgbClr val="FFFFFF"/>
                 </a:solidFill>
-                <a:latin typeface="Arial" pitchFamily="34" charset="0"/>
-                <a:ea typeface="Arial" pitchFamily="34" charset="-122"/>
-                <a:cs typeface="Arial" pitchFamily="34" charset="-120"/>
+                <a:latin typeface="Arial" panose="020B0604020202020204" pitchFamily="34" charset="0"/>
+                <a:ea typeface="Arial" panose="020B0604020202020204" pitchFamily="34" charset="-122"/>
+                <a:cs typeface="Arial" panose="020B0604020202020204" pitchFamily="34" charset="-120"/>
               </a:rPr>
               <a:t>02</a:t>
             </a:r>
@@ -5380,13 +5302,12 @@
             <a:avLst/>
           </a:prstGeom>
           <a:noFill/>
-          <a:ln/>
-        </p:spPr>
-        <p:txBody>
-          <a:bodyPr wrap="square" rtlCol="0" anchor="ctr"/>
-          <a:lstStyle/>
-          <a:p>
-            <a:pPr indent="0" marL="0">
+        </p:spPr>
+        <p:txBody>
+          <a:bodyPr wrap="square" rtlCol="0" anchor="ctr"/>
+          <a:lstStyle/>
+          <a:p>
+            <a:pPr marL="0" indent="0">
               <a:buNone/>
             </a:pPr>
             <a:r>
@@ -5394,9 +5315,9 @@
                 <a:solidFill>
                   <a:srgbClr val="2B2B2B"/>
                 </a:solidFill>
-                <a:latin typeface="Arial" pitchFamily="34" charset="0"/>
-                <a:ea typeface="Arial" pitchFamily="34" charset="-122"/>
-                <a:cs typeface="Arial" pitchFamily="34" charset="-120"/>
+                <a:latin typeface="Arial" panose="020B0604020202020204" pitchFamily="34" charset="0"/>
+                <a:ea typeface="Arial" panose="020B0604020202020204" pitchFamily="34" charset="-122"/>
+                <a:cs typeface="Arial" panose="020B0604020202020204" pitchFamily="34" charset="-120"/>
               </a:rPr>
               <a:t>盲盒记忆挑战</a:t>
             </a:r>
@@ -5419,13 +5340,12 @@
             <a:avLst/>
           </a:prstGeom>
           <a:noFill/>
-          <a:ln/>
         </p:spPr>
         <p:txBody>
           <a:bodyPr wrap="square" rtlCol="0" anchor="t"/>
           <a:lstStyle/>
           <a:p>
-            <a:pPr indent="0" marL="0">
+            <a:pPr marL="0" indent="0">
               <a:buNone/>
             </a:pPr>
             <a:r>
@@ -5433,9 +5353,9 @@
                 <a:solidFill>
                   <a:srgbClr val="7A7A7A"/>
                 </a:solidFill>
-                <a:latin typeface="Arial" pitchFamily="34" charset="0"/>
-                <a:ea typeface="Arial" pitchFamily="34" charset="-122"/>
-                <a:cs typeface="Arial" pitchFamily="34" charset="-120"/>
+                <a:latin typeface="Arial" panose="020B0604020202020204" pitchFamily="34" charset="0"/>
+                <a:ea typeface="Arial" panose="020B0604020202020204" pitchFamily="34" charset="-122"/>
+                <a:cs typeface="Arial" panose="020B0604020202020204" pitchFamily="34" charset="-120"/>
               </a:rPr>
               <a:t>底部水层彩虹流彩遮挡，上层倒空前不可见/不可操作，逐层揭示增加记忆难度。</a:t>
             </a:r>
@@ -5460,7 +5380,6 @@
           <a:solidFill>
             <a:srgbClr val="D4A853"/>
           </a:solidFill>
-          <a:ln/>
         </p:spPr>
       </p:sp>
       <p:sp>
@@ -5478,13 +5397,12 @@
             <a:avLst/>
           </a:prstGeom>
           <a:noFill/>
-          <a:ln/>
-        </p:spPr>
-        <p:txBody>
-          <a:bodyPr wrap="square" rtlCol="0" anchor="ctr"/>
-          <a:lstStyle/>
-          <a:p>
-            <a:pPr algn="ctr" indent="0" marL="0">
+        </p:spPr>
+        <p:txBody>
+          <a:bodyPr wrap="square" rtlCol="0" anchor="ctr"/>
+          <a:lstStyle/>
+          <a:p>
+            <a:pPr marL="0" indent="0" algn="ctr">
               <a:buNone/>
             </a:pPr>
             <a:r>
@@ -5492,9 +5410,9 @@
                 <a:solidFill>
                   <a:srgbClr val="FFFFFF"/>
                 </a:solidFill>
-                <a:latin typeface="Arial" pitchFamily="34" charset="0"/>
-                <a:ea typeface="Arial" pitchFamily="34" charset="-122"/>
-                <a:cs typeface="Arial" pitchFamily="34" charset="-120"/>
+                <a:latin typeface="Arial" panose="020B0604020202020204" pitchFamily="34" charset="0"/>
+                <a:ea typeface="Arial" panose="020B0604020202020204" pitchFamily="34" charset="-122"/>
+                <a:cs typeface="Arial" panose="020B0604020202020204" pitchFamily="34" charset="-120"/>
               </a:rPr>
               <a:t>03</a:t>
             </a:r>
@@ -5517,13 +5435,12 @@
             <a:avLst/>
           </a:prstGeom>
           <a:noFill/>
-          <a:ln/>
-        </p:spPr>
-        <p:txBody>
-          <a:bodyPr wrap="square" rtlCol="0" anchor="ctr"/>
-          <a:lstStyle/>
-          <a:p>
-            <a:pPr indent="0" marL="0">
+        </p:spPr>
+        <p:txBody>
+          <a:bodyPr wrap="square" rtlCol="0" anchor="ctr"/>
+          <a:lstStyle/>
+          <a:p>
+            <a:pPr marL="0" indent="0">
               <a:buNone/>
             </a:pPr>
             <a:r>
@@ -5531,9 +5448,9 @@
                 <a:solidFill>
                   <a:srgbClr val="2B2B2B"/>
                 </a:solidFill>
-                <a:latin typeface="Arial" pitchFamily="34" charset="0"/>
-                <a:ea typeface="Arial" pitchFamily="34" charset="-122"/>
-                <a:cs typeface="Arial" pitchFamily="34" charset="-120"/>
+                <a:latin typeface="Arial" panose="020B0604020202020204" pitchFamily="34" charset="0"/>
+                <a:ea typeface="Arial" panose="020B0604020202020204" pitchFamily="34" charset="-122"/>
+                <a:cs typeface="Arial" panose="020B0604020202020204" pitchFamily="34" charset="-120"/>
               </a:rPr>
               <a:t>变容模式</a:t>
             </a:r>
@@ -5556,13 +5473,12 @@
             <a:avLst/>
           </a:prstGeom>
           <a:noFill/>
-          <a:ln/>
         </p:spPr>
         <p:txBody>
           <a:bodyPr wrap="square" rtlCol="0" anchor="t"/>
           <a:lstStyle/>
           <a:p>
-            <a:pPr indent="0" marL="0">
+            <a:pPr marL="0" indent="0">
               <a:buNone/>
             </a:pPr>
             <a:r>
@@ -5570,9 +5486,9 @@
                 <a:solidFill>
                   <a:srgbClr val="7A7A7A"/>
                 </a:solidFill>
-                <a:latin typeface="Arial" pitchFamily="34" charset="0"/>
-                <a:ea typeface="Arial" pitchFamily="34" charset="-122"/>
-                <a:cs typeface="Arial" pitchFamily="34" charset="-120"/>
+                <a:latin typeface="Arial" panose="020B0604020202020204" pitchFamily="34" charset="0"/>
+                <a:ea typeface="Arial" panose="020B0604020202020204" pitchFamily="34" charset="-122"/>
+                <a:cs typeface="Arial" panose="020B0604020202020204" pitchFamily="34" charset="-120"/>
               </a:rPr>
               <a:t>打破固定4层容量，每管2-8层可变，颜色总数=目标容量，装错即卡关，深度策略性。</a:t>
             </a:r>
@@ -5597,7 +5513,6 @@
           <a:solidFill>
             <a:srgbClr val="D4A853"/>
           </a:solidFill>
-          <a:ln/>
         </p:spPr>
       </p:sp>
       <p:sp>
@@ -5615,13 +5530,12 @@
             <a:avLst/>
           </a:prstGeom>
           <a:noFill/>
-          <a:ln/>
-        </p:spPr>
-        <p:txBody>
-          <a:bodyPr wrap="square" rtlCol="0" anchor="ctr"/>
-          <a:lstStyle/>
-          <a:p>
-            <a:pPr algn="ctr" indent="0" marL="0">
+        </p:spPr>
+        <p:txBody>
+          <a:bodyPr wrap="square" rtlCol="0" anchor="ctr"/>
+          <a:lstStyle/>
+          <a:p>
+            <a:pPr marL="0" indent="0" algn="ctr">
               <a:buNone/>
             </a:pPr>
             <a:r>
@@ -5629,9 +5543,9 @@
                 <a:solidFill>
                   <a:srgbClr val="FFFFFF"/>
                 </a:solidFill>
-                <a:latin typeface="Arial" pitchFamily="34" charset="0"/>
-                <a:ea typeface="Arial" pitchFamily="34" charset="-122"/>
-                <a:cs typeface="Arial" pitchFamily="34" charset="-120"/>
+                <a:latin typeface="Arial" panose="020B0604020202020204" pitchFamily="34" charset="0"/>
+                <a:ea typeface="Arial" panose="020B0604020202020204" pitchFamily="34" charset="-122"/>
+                <a:cs typeface="Arial" panose="020B0604020202020204" pitchFamily="34" charset="-120"/>
               </a:rPr>
               <a:t>04</a:t>
             </a:r>
@@ -5654,13 +5568,12 @@
             <a:avLst/>
           </a:prstGeom>
           <a:noFill/>
-          <a:ln/>
-        </p:spPr>
-        <p:txBody>
-          <a:bodyPr wrap="square" rtlCol="0" anchor="ctr"/>
-          <a:lstStyle/>
-          <a:p>
-            <a:pPr indent="0" marL="0">
+        </p:spPr>
+        <p:txBody>
+          <a:bodyPr wrap="square" rtlCol="0" anchor="ctr"/>
+          <a:lstStyle/>
+          <a:p>
+            <a:pPr marL="0" indent="0">
               <a:buNone/>
             </a:pPr>
             <a:r>
@@ -5668,9 +5581,9 @@
                 <a:solidFill>
                   <a:srgbClr val="2B2B2B"/>
                 </a:solidFill>
-                <a:latin typeface="Arial" pitchFamily="34" charset="0"/>
-                <a:ea typeface="Arial" pitchFamily="34" charset="-122"/>
-                <a:cs typeface="Arial" pitchFamily="34" charset="-120"/>
+                <a:latin typeface="Arial" panose="020B0604020202020204" pitchFamily="34" charset="0"/>
+                <a:ea typeface="Arial" panose="020B0604020202020204" pitchFamily="34" charset="-122"/>
+                <a:cs typeface="Arial" panose="020B0604020202020204" pitchFamily="34" charset="-120"/>
               </a:rPr>
               <a:t>实时水物理特效</a:t>
             </a:r>
@@ -5693,13 +5606,12 @@
             <a:avLst/>
           </a:prstGeom>
           <a:noFill/>
-          <a:ln/>
         </p:spPr>
         <p:txBody>
           <a:bodyPr wrap="square" rtlCol="0" anchor="t"/>
           <a:lstStyle/>
           <a:p>
-            <a:pPr indent="0" marL="0">
+            <a:pPr marL="0" indent="0">
               <a:buNone/>
             </a:pPr>
             <a:r>
@@ -5707,9 +5619,9 @@
                 <a:solidFill>
                   <a:srgbClr val="7A7A7A"/>
                 </a:solidFill>
-                <a:latin typeface="Arial" pitchFamily="34" charset="0"/>
-                <a:ea typeface="Arial" pitchFamily="34" charset="-122"/>
-                <a:cs typeface="Arial" pitchFamily="34" charset="-120"/>
+                <a:latin typeface="Arial" panose="020B0604020202020204" pitchFamily="34" charset="0"/>
+                <a:ea typeface="Arial" panose="020B0604020202020204" pitchFamily="34" charset="-122"/>
+                <a:cs typeface="Arial" panose="020B0604020202020204" pitchFamily="34" charset="-120"/>
               </a:rPr>
               <a:t>动态波浪水面、内部涟漪、侧面反光，借鉴 Cocos 游戏引擎效果，纯 Canvas 实现。</a:t>
             </a:r>
@@ -5734,7 +5646,6 @@
           <a:solidFill>
             <a:srgbClr val="D4A853"/>
           </a:solidFill>
-          <a:ln/>
         </p:spPr>
       </p:sp>
       <p:sp>
@@ -5752,13 +5663,12 @@
             <a:avLst/>
           </a:prstGeom>
           <a:noFill/>
-          <a:ln/>
-        </p:spPr>
-        <p:txBody>
-          <a:bodyPr wrap="square" rtlCol="0" anchor="ctr"/>
-          <a:lstStyle/>
-          <a:p>
-            <a:pPr algn="ctr" indent="0" marL="0">
+        </p:spPr>
+        <p:txBody>
+          <a:bodyPr wrap="square" rtlCol="0" anchor="ctr"/>
+          <a:lstStyle/>
+          <a:p>
+            <a:pPr marL="0" indent="0" algn="ctr">
               <a:buNone/>
             </a:pPr>
             <a:r>
@@ -5766,9 +5676,9 @@
                 <a:solidFill>
                   <a:srgbClr val="FFFFFF"/>
                 </a:solidFill>
-                <a:latin typeface="Arial" pitchFamily="34" charset="0"/>
-                <a:ea typeface="Arial" pitchFamily="34" charset="-122"/>
-                <a:cs typeface="Arial" pitchFamily="34" charset="-120"/>
+                <a:latin typeface="Arial" panose="020B0604020202020204" pitchFamily="34" charset="0"/>
+                <a:ea typeface="Arial" panose="020B0604020202020204" pitchFamily="34" charset="-122"/>
+                <a:cs typeface="Arial" panose="020B0604020202020204" pitchFamily="34" charset="-120"/>
               </a:rPr>
               <a:t>05</a:t>
             </a:r>
@@ -5791,13 +5701,12 @@
             <a:avLst/>
           </a:prstGeom>
           <a:noFill/>
-          <a:ln/>
-        </p:spPr>
-        <p:txBody>
-          <a:bodyPr wrap="square" rtlCol="0" anchor="ctr"/>
-          <a:lstStyle/>
-          <a:p>
-            <a:pPr indent="0" marL="0">
+        </p:spPr>
+        <p:txBody>
+          <a:bodyPr wrap="square" rtlCol="0" anchor="ctr"/>
+          <a:lstStyle/>
+          <a:p>
+            <a:pPr marL="0" indent="0">
               <a:buNone/>
             </a:pPr>
             <a:r>
@@ -5805,9 +5714,9 @@
                 <a:solidFill>
                   <a:srgbClr val="2B2B2B"/>
                 </a:solidFill>
-                <a:latin typeface="Arial" pitchFamily="34" charset="0"/>
-                <a:ea typeface="Arial" pitchFamily="34" charset="-122"/>
-                <a:cs typeface="Arial" pitchFamily="34" charset="-120"/>
+                <a:latin typeface="Arial" panose="020B0604020202020204" pitchFamily="34" charset="0"/>
+                <a:ea typeface="Arial" panose="020B0604020202020204" pitchFamily="34" charset="-122"/>
+                <a:cs typeface="Arial" panose="020B0604020202020204" pitchFamily="34" charset="-120"/>
               </a:rPr>
               <a:t>自制关卡系统</a:t>
             </a:r>
@@ -5830,13 +5739,12 @@
             <a:avLst/>
           </a:prstGeom>
           <a:noFill/>
-          <a:ln/>
         </p:spPr>
         <p:txBody>
           <a:bodyPr wrap="square" rtlCol="0" anchor="t"/>
           <a:lstStyle/>
           <a:p>
-            <a:pPr indent="0" marL="0">
+            <a:pPr marL="0" indent="0">
               <a:buNone/>
             </a:pPr>
             <a:r>
@@ -5844,9 +5752,9 @@
                 <a:solidFill>
                   <a:srgbClr val="7A7A7A"/>
                 </a:solidFill>
-                <a:latin typeface="Arial" pitchFamily="34" charset="0"/>
-                <a:ea typeface="Arial" pitchFamily="34" charset="-122"/>
-                <a:cs typeface="Arial" pitchFamily="34" charset="-120"/>
+                <a:latin typeface="Arial" panose="020B0604020202020204" pitchFamily="34" charset="0"/>
+                <a:ea typeface="Arial" panose="020B0604020202020204" pitchFamily="34" charset="-122"/>
+                <a:cs typeface="Arial" panose="020B0604020202020204" pitchFamily="34" charset="-120"/>
               </a:rPr>
               <a:t>可视化编辑器 + 盲盒/变容参数 + DFS可解性校验 + localStorage持久化，玩家即创作者。</a:t>
             </a:r>
@@ -5869,13 +5777,12 @@
             <a:avLst/>
           </a:prstGeom>
           <a:noFill/>
-          <a:ln/>
-        </p:spPr>
-        <p:txBody>
-          <a:bodyPr wrap="square" rtlCol="0" anchor="ctr"/>
-          <a:lstStyle/>
-          <a:p>
-            <a:pPr algn="ctr" indent="0" marL="0">
+        </p:spPr>
+        <p:txBody>
+          <a:bodyPr wrap="square" rtlCol="0" anchor="ctr"/>
+          <a:lstStyle/>
+          <a:p>
+            <a:pPr marL="0" indent="0" algn="ctr">
               <a:buNone/>
             </a:pPr>
             <a:r>
@@ -5900,12 +5807,13 @@
 
 <file path=ppt/slides/slide8.xml><?xml version="1.0" encoding="utf-8"?>
 <p:sld xmlns:a="http://schemas.openxmlformats.org/drawingml/2006/main" xmlns:r="http://schemas.openxmlformats.org/officeDocument/2006/relationships" xmlns:p="http://schemas.openxmlformats.org/presentationml/2006/main">
-  <p:cSld name="Slide 8">
+  <p:cSld>
     <p:bg>
       <p:bgPr>
         <a:solidFill>
           <a:srgbClr val="2B2B2B"/>
         </a:solidFill>
+        <a:effectLst/>
       </p:bgPr>
     </p:bg>
     <p:spTree>
@@ -5937,13 +5845,12 @@
             <a:avLst/>
           </a:prstGeom>
           <a:noFill/>
-          <a:ln/>
-        </p:spPr>
-        <p:txBody>
-          <a:bodyPr wrap="square" rtlCol="0" anchor="ctr"/>
-          <a:lstStyle/>
-          <a:p>
-            <a:pPr algn="ctr" indent="0" marL="0">
+        </p:spPr>
+        <p:txBody>
+          <a:bodyPr wrap="square" rtlCol="0" anchor="ctr"/>
+          <a:lstStyle/>
+          <a:p>
+            <a:pPr marL="0" indent="0" algn="ctr">
               <a:buNone/>
             </a:pPr>
             <a:r>
@@ -5973,13 +5880,12 @@
             <a:avLst/>
           </a:prstGeom>
           <a:noFill/>
-          <a:ln/>
-        </p:spPr>
-        <p:txBody>
-          <a:bodyPr wrap="square" rtlCol="0" anchor="ctr"/>
-          <a:lstStyle/>
-          <a:p>
-            <a:pPr algn="ctr" indent="0" marL="0">
+        </p:spPr>
+        <p:txBody>
+          <a:bodyPr wrap="square" rtlCol="0" anchor="ctr"/>
+          <a:lstStyle/>
+          <a:p>
+            <a:pPr marL="0" indent="0" algn="ctr">
               <a:buNone/>
             </a:pPr>
             <a:r>
@@ -5987,9 +5893,9 @@
                 <a:solidFill>
                   <a:srgbClr val="FFFFFF"/>
                 </a:solidFill>
-                <a:latin typeface="Arial" pitchFamily="34" charset="0"/>
-                <a:ea typeface="Arial" pitchFamily="34" charset="-122"/>
-                <a:cs typeface="Arial" pitchFamily="34" charset="-120"/>
+                <a:latin typeface="Arial" panose="020B0604020202020204" pitchFamily="34" charset="0"/>
+                <a:ea typeface="Arial" panose="020B0604020202020204" pitchFamily="34" charset="-122"/>
+                <a:cs typeface="Arial" panose="020B0604020202020204" pitchFamily="34" charset="-120"/>
               </a:rPr>
               <a:t>简约清新的益智挑战</a:t>
             </a:r>
@@ -6012,13 +5918,12 @@
             <a:avLst/>
           </a:prstGeom>
           <a:noFill/>
-          <a:ln/>
-        </p:spPr>
-        <p:txBody>
-          <a:bodyPr wrap="square" rtlCol="0" anchor="ctr"/>
-          <a:lstStyle/>
-          <a:p>
-            <a:pPr algn="ctr" indent="0" marL="0">
+        </p:spPr>
+        <p:txBody>
+          <a:bodyPr wrap="square" rtlCol="0" anchor="ctr"/>
+          <a:lstStyle/>
+          <a:p>
+            <a:pPr marL="0" indent="0" algn="ctr">
               <a:spcAft>
                 <a:spcPts val="1000"/>
               </a:spcAft>
@@ -6029,16 +5934,16 @@
                 <a:solidFill>
                   <a:srgbClr val="CCCCCC"/>
                 </a:solidFill>
-                <a:latin typeface="Arial" pitchFamily="34" charset="0"/>
-                <a:ea typeface="Arial" pitchFamily="34" charset="-122"/>
-                <a:cs typeface="Arial" pitchFamily="34" charset="-120"/>
+                <a:latin typeface="Arial" panose="020B0604020202020204" pitchFamily="34" charset="0"/>
+                <a:ea typeface="Arial" panose="020B0604020202020204" pitchFamily="34" charset="-122"/>
+                <a:cs typeface="Arial" panose="020B0604020202020204" pitchFamily="34" charset="-120"/>
               </a:rPr>
               <a:t>丰富的游戏模式 — 闯关 / 经典 / 盲盒 / 变容 / 自制</a:t>
             </a:r>
             <a:endParaRPr lang="en-US" sz="1600" dirty="0"/>
           </a:p>
           <a:p>
-            <a:pPr algn="ctr" indent="0" marL="0">
+            <a:pPr marL="0" indent="0" algn="ctr">
               <a:spcAft>
                 <a:spcPts val="1000"/>
               </a:spcAft>
@@ -6049,16 +5954,16 @@
                 <a:solidFill>
                   <a:srgbClr val="CCCCCC"/>
                 </a:solidFill>
-                <a:latin typeface="Arial" pitchFamily="34" charset="0"/>
-                <a:ea typeface="Arial" pitchFamily="34" charset="-122"/>
-                <a:cs typeface="Arial" pitchFamily="34" charset="-120"/>
+                <a:latin typeface="Arial" panose="020B0604020202020204" pitchFamily="34" charset="0"/>
+                <a:ea typeface="Arial" panose="020B0604020202020204" pitchFamily="34" charset="-122"/>
+                <a:cs typeface="Arial" panose="020B0604020202020204" pitchFamily="34" charset="-120"/>
               </a:rPr>
               <a:t>精致的视觉效果 — 波浪水面 / 动态倒水 / 彩虹盲盒</a:t>
             </a:r>
             <a:endParaRPr lang="en-US" sz="1600" dirty="0"/>
           </a:p>
           <a:p>
-            <a:pPr algn="ctr" indent="0" marL="0">
+            <a:pPr marL="0" indent="0" algn="ctr">
               <a:spcAft>
                 <a:spcPts val="1000"/>
               </a:spcAft>
@@ -6069,16 +5974,16 @@
                 <a:solidFill>
                   <a:srgbClr val="CCCCCC"/>
                 </a:solidFill>
-                <a:latin typeface="Arial" pitchFamily="34" charset="0"/>
-                <a:ea typeface="Arial" pitchFamily="34" charset="-122"/>
-                <a:cs typeface="Arial" pitchFamily="34" charset="-120"/>
+                <a:latin typeface="Arial" panose="020B0604020202020204" pitchFamily="34" charset="0"/>
+                <a:ea typeface="Arial" panose="020B0604020202020204" pitchFamily="34" charset="-122"/>
+                <a:cs typeface="Arial" panose="020B0604020202020204" pitchFamily="34" charset="-120"/>
               </a:rPr>
               <a:t>完善的自制系统 — 可视化编辑 / 可解性检测 / 云端存储</a:t>
             </a:r>
             <a:endParaRPr lang="en-US" sz="1600" dirty="0"/>
           </a:p>
           <a:p>
-            <a:pPr algn="ctr" indent="0" marL="0">
+            <a:pPr marL="0" indent="0" algn="ctr">
               <a:spcAft>
                 <a:spcPts val="1000"/>
               </a:spcAft>
@@ -6089,9 +5994,9 @@
                 <a:solidFill>
                   <a:srgbClr val="CCCCCC"/>
                 </a:solidFill>
-                <a:latin typeface="Arial" pitchFamily="34" charset="0"/>
-                <a:ea typeface="Arial" pitchFamily="34" charset="-122"/>
-                <a:cs typeface="Arial" pitchFamily="34" charset="-120"/>
+                <a:latin typeface="Arial" panose="020B0604020202020204" pitchFamily="34" charset="0"/>
+                <a:ea typeface="Arial" panose="020B0604020202020204" pitchFamily="34" charset="-122"/>
+                <a:cs typeface="Arial" panose="020B0604020202020204" pitchFamily="34" charset="-120"/>
               </a:rPr>
               <a:t>零依赖纯前端 — 浏览器即开即玩 / 14KB 压缩后体积</a:t>
             </a:r>
@@ -6116,7 +6021,6 @@
           <a:solidFill>
             <a:srgbClr val="3A3A3A"/>
           </a:solidFill>
-          <a:ln/>
         </p:spPr>
       </p:sp>
       <p:sp>
@@ -6134,13 +6038,12 @@
             <a:avLst/>
           </a:prstGeom>
           <a:noFill/>
-          <a:ln/>
-        </p:spPr>
-        <p:txBody>
-          <a:bodyPr wrap="square" rtlCol="0" anchor="ctr"/>
-          <a:lstStyle/>
-          <a:p>
-            <a:pPr algn="ctr" indent="0" marL="0">
+        </p:spPr>
+        <p:txBody>
+          <a:bodyPr wrap="square" rtlCol="0" anchor="ctr"/>
+          <a:lstStyle/>
+          <a:p>
+            <a:pPr marL="0" indent="0" algn="ctr">
               <a:buNone/>
             </a:pPr>
             <a:r>
@@ -6148,9 +6051,9 @@
                 <a:solidFill>
                   <a:srgbClr val="D4A853"/>
                 </a:solidFill>
-                <a:latin typeface="Arial" pitchFamily="34" charset="0"/>
-                <a:ea typeface="Arial" pitchFamily="34" charset="-122"/>
-                <a:cs typeface="Arial" pitchFamily="34" charset="-120"/>
+                <a:latin typeface="Arial" panose="020B0604020202020204" pitchFamily="34" charset="0"/>
+                <a:ea typeface="Arial" panose="020B0604020202020204" pitchFamily="34" charset="-122"/>
+                <a:cs typeface="Arial" panose="020B0604020202020204" pitchFamily="34" charset="-120"/>
               </a:rPr>
               <a:t>扫码立即体验 →</a:t>
             </a:r>
@@ -6158,12 +6061,72 @@
           </a:p>
         </p:txBody>
       </p:sp>
+      <p:pic>
+        <p:nvPicPr>
+          <p:cNvPr id="7" name="图片 6" descr="qrcode"/>
+          <p:cNvPicPr>
+            <a:picLocks noChangeAspect="1"/>
+          </p:cNvPicPr>
+          <p:nvPr/>
+        </p:nvPicPr>
+        <p:blipFill>
+          <a:blip r:embed="rId1"/>
+          <a:stretch>
+            <a:fillRect/>
+          </a:stretch>
+        </p:blipFill>
+        <p:spPr>
+          <a:xfrm>
+            <a:off x="5480685" y="3888740"/>
+            <a:ext cx="1144905" cy="1144905"/>
+          </a:xfrm>
+          <a:prstGeom prst="rect">
+            <a:avLst/>
+          </a:prstGeom>
+        </p:spPr>
+      </p:pic>
     </p:spTree>
   </p:cSld>
   <p:clrMapOvr>
     <a:masterClrMapping/>
   </p:clrMapOvr>
 </p:sld>
+</file>
+
+<file path=ppt/tags/tag1.xml><?xml version="1.0" encoding="utf-8"?>
+<p:tagLst xmlns:p="http://schemas.openxmlformats.org/presentationml/2006/main">
+  <p:tag name="KSO_WM_DIAGRAM_VIRTUALLY_FRAME" val="{&quot;height&quot;:273.6,&quot;left&quot;:36,&quot;top&quot;:86.4,&quot;width&quot;:648}"/>
+</p:tagLst>
+</file>
+
+<file path=ppt/tags/tag2.xml><?xml version="1.0" encoding="utf-8"?>
+<p:tagLst xmlns:p="http://schemas.openxmlformats.org/presentationml/2006/main">
+  <p:tag name="KSO_WM_DIAGRAM_VIRTUALLY_FRAME" val="{&quot;height&quot;:273.6,&quot;left&quot;:36,&quot;top&quot;:86.4,&quot;width&quot;:648}"/>
+</p:tagLst>
+</file>
+
+<file path=ppt/tags/tag3.xml><?xml version="1.0" encoding="utf-8"?>
+<p:tagLst xmlns:p="http://schemas.openxmlformats.org/presentationml/2006/main">
+  <p:tag name="KSO_WM_DIAGRAM_VIRTUALLY_FRAME" val="{&quot;height&quot;:273.6,&quot;left&quot;:36,&quot;top&quot;:86.4,&quot;width&quot;:648}"/>
+</p:tagLst>
+</file>
+
+<file path=ppt/tags/tag4.xml><?xml version="1.0" encoding="utf-8"?>
+<p:tagLst xmlns:p="http://schemas.openxmlformats.org/presentationml/2006/main">
+  <p:tag name="KSO_WM_DIAGRAM_VIRTUALLY_FRAME" val="{&quot;height&quot;:273.6,&quot;left&quot;:36,&quot;top&quot;:86.4,&quot;width&quot;:648}"/>
+</p:tagLst>
+</file>
+
+<file path=ppt/tags/tag5.xml><?xml version="1.0" encoding="utf-8"?>
+<p:tagLst xmlns:p="http://schemas.openxmlformats.org/presentationml/2006/main">
+  <p:tag name="KSO_WM_DIAGRAM_VIRTUALLY_FRAME" val="{&quot;height&quot;:273.6,&quot;left&quot;:36,&quot;top&quot;:86.4,&quot;width&quot;:648}"/>
+</p:tagLst>
+</file>
+
+<file path=ppt/tags/tag6.xml><?xml version="1.0" encoding="utf-8"?>
+<p:tagLst xmlns:p="http://schemas.openxmlformats.org/presentationml/2006/main">
+  <p:tag name="KSO_WM_DIAGRAM_VIRTUALLY_FRAME" val="{&quot;height&quot;:273.6,&quot;left&quot;:36,&quot;top&quot;:86.4,&quot;width&quot;:648}"/>
+</p:tagLst>
 </file>
 
 <file path=ppt/theme/theme1.xml><?xml version="1.0" encoding="utf-8"?>
@@ -6209,7 +6172,7 @@
     </a:clrScheme>
     <a:fontScheme name="Office">
       <a:majorFont>
-        <a:latin typeface="Calibri Light" panose="020F0302020204030204"/>
+        <a:latin typeface="Calibri Light"/>
         <a:ea typeface=""/>
         <a:cs typeface=""/>
         <a:font script="Jpan" typeface="游ゴシック Light"/>
@@ -6242,26 +6205,9 @@
         <a:font script="Viet" typeface="Times New Roman"/>
         <a:font script="Uigh" typeface="Microsoft Uighur"/>
         <a:font script="Geor" typeface="Sylfaen"/>
-        <a:font script="Armn" typeface="Arial"/>
-        <a:font script="Bugi" typeface="Leelawadee UI"/>
-        <a:font script="Bopo" typeface="Microsoft JhengHei"/>
-        <a:font script="Java" typeface="Javanese Text"/>
-        <a:font script="Lisu" typeface="Segoe UI"/>
-        <a:font script="Mymr" typeface="Myanmar Text"/>
-        <a:font script="Nkoo" typeface="Ebrima"/>
-        <a:font script="Olck" typeface="Nirmala UI"/>
-        <a:font script="Osma" typeface="Ebrima"/>
-        <a:font script="Phag" typeface="Phagspa"/>
-        <a:font script="Syrn" typeface="Estrangelo Edessa"/>
-        <a:font script="Syrj" typeface="Estrangelo Edessa"/>
-        <a:font script="Syre" typeface="Estrangelo Edessa"/>
-        <a:font script="Sora" typeface="Nirmala UI"/>
-        <a:font script="Tale" typeface="Microsoft Tai Le"/>
-        <a:font script="Talu" typeface="Microsoft New Tai Lue"/>
-        <a:font script="Tfng" typeface="Ebrima"/>
       </a:majorFont>
       <a:minorFont>
-        <a:latin typeface="Calibri" panose="020F0502020204030204"/>
+        <a:latin typeface="Calibri"/>
         <a:ea typeface=""/>
         <a:cs typeface=""/>
         <a:font script="Jpan" typeface="游ゴシック"/>
@@ -6294,23 +6240,6 @@
         <a:font script="Viet" typeface="Arial"/>
         <a:font script="Uigh" typeface="Microsoft Uighur"/>
         <a:font script="Geor" typeface="Sylfaen"/>
-        <a:font script="Armn" typeface="Arial"/>
-        <a:font script="Bugi" typeface="Leelawadee UI"/>
-        <a:font script="Bopo" typeface="Microsoft JhengHei"/>
-        <a:font script="Java" typeface="Javanese Text"/>
-        <a:font script="Lisu" typeface="Segoe UI"/>
-        <a:font script="Mymr" typeface="Myanmar Text"/>
-        <a:font script="Nkoo" typeface="Ebrima"/>
-        <a:font script="Olck" typeface="Nirmala UI"/>
-        <a:font script="Osma" typeface="Ebrima"/>
-        <a:font script="Phag" typeface="Phagspa"/>
-        <a:font script="Syrn" typeface="Estrangelo Edessa"/>
-        <a:font script="Syrj" typeface="Estrangelo Edessa"/>
-        <a:font script="Syre" typeface="Estrangelo Edessa"/>
-        <a:font script="Sora" typeface="Nirmala UI"/>
-        <a:font script="Tale" typeface="Microsoft Tai Le"/>
-        <a:font script="Talu" typeface="Microsoft New Tai Lue"/>
-        <a:font script="Tfng" typeface="Ebrima"/>
       </a:minorFont>
     </a:fontScheme>
     <a:fmtScheme name="Office">
@@ -6451,8 +6380,265 @@
       </a:bgFillStyleLst>
     </a:fmtScheme>
   </a:themeElements>
-  <a:objectDefaults/>
-  <a:extraClrSchemeLst/>
+  <a:extLst>
+    <a:ext uri="{05A4C25C-085E-4340-85A3-A5531E510DB2}">
+      <thm15:themeFamily xmlns:thm15="http://schemas.microsoft.com/office/thememl/2012/main" name="Office Theme" id="{62F939B6-93AF-4DB8-9C6B-D6C7DFDC589F}" vid="{4A3C46E8-61CC-4603-A589-7422A47A8E4A}"/>
+    </a:ext>
+  </a:extLst>
+</a:theme>
+</file>
+
+<file path=ppt/theme/theme2.xml><?xml version="1.0" encoding="utf-8"?>
+<a:theme xmlns:a="http://schemas.openxmlformats.org/drawingml/2006/main" name="Office Theme">
+  <a:themeElements>
+    <a:clrScheme name="Office">
+      <a:dk1>
+        <a:sysClr val="windowText" lastClr="000000"/>
+      </a:dk1>
+      <a:lt1>
+        <a:sysClr val="window" lastClr="FFFFFF"/>
+      </a:lt1>
+      <a:dk2>
+        <a:srgbClr val="44546A"/>
+      </a:dk2>
+      <a:lt2>
+        <a:srgbClr val="E7E6E6"/>
+      </a:lt2>
+      <a:accent1>
+        <a:srgbClr val="4472C4"/>
+      </a:accent1>
+      <a:accent2>
+        <a:srgbClr val="ED7D31"/>
+      </a:accent2>
+      <a:accent3>
+        <a:srgbClr val="A5A5A5"/>
+      </a:accent3>
+      <a:accent4>
+        <a:srgbClr val="FFC000"/>
+      </a:accent4>
+      <a:accent5>
+        <a:srgbClr val="5B9BD5"/>
+      </a:accent5>
+      <a:accent6>
+        <a:srgbClr val="70AD47"/>
+      </a:accent6>
+      <a:hlink>
+        <a:srgbClr val="0563C1"/>
+      </a:hlink>
+      <a:folHlink>
+        <a:srgbClr val="954F72"/>
+      </a:folHlink>
+    </a:clrScheme>
+    <a:fontScheme name="Office">
+      <a:majorFont>
+        <a:latin typeface="Calibri Light"/>
+        <a:ea typeface=""/>
+        <a:cs typeface=""/>
+        <a:font script="Jpan" typeface="游ゴシック Light"/>
+        <a:font script="Hang" typeface="맑은 고딕"/>
+        <a:font script="Hans" typeface="等线 Light"/>
+        <a:font script="Hant" typeface="新細明體"/>
+        <a:font script="Arab" typeface="Times New Roman"/>
+        <a:font script="Hebr" typeface="Times New Roman"/>
+        <a:font script="Thai" typeface="Angsana New"/>
+        <a:font script="Ethi" typeface="Nyala"/>
+        <a:font script="Beng" typeface="Vrinda"/>
+        <a:font script="Gujr" typeface="Shruti"/>
+        <a:font script="Khmr" typeface="MoolBoran"/>
+        <a:font script="Knda" typeface="Tunga"/>
+        <a:font script="Guru" typeface="Raavi"/>
+        <a:font script="Cans" typeface="Euphemia"/>
+        <a:font script="Cher" typeface="Plantagenet Cherokee"/>
+        <a:font script="Yiii" typeface="Microsoft Yi Baiti"/>
+        <a:font script="Tibt" typeface="Microsoft Himalaya"/>
+        <a:font script="Thaa" typeface="MV Boli"/>
+        <a:font script="Deva" typeface="Mangal"/>
+        <a:font script="Telu" typeface="Gautami"/>
+        <a:font script="Taml" typeface="Latha"/>
+        <a:font script="Syrc" typeface="Estrangelo Edessa"/>
+        <a:font script="Orya" typeface="Kalinga"/>
+        <a:font script="Mlym" typeface="Kartika"/>
+        <a:font script="Laoo" typeface="DokChampa"/>
+        <a:font script="Sinh" typeface="Iskoola Pota"/>
+        <a:font script="Mong" typeface="Mongolian Baiti"/>
+        <a:font script="Viet" typeface="Times New Roman"/>
+        <a:font script="Uigh" typeface="Microsoft Uighur"/>
+        <a:font script="Geor" typeface="Sylfaen"/>
+      </a:majorFont>
+      <a:minorFont>
+        <a:latin typeface="Calibri"/>
+        <a:ea typeface=""/>
+        <a:cs typeface=""/>
+        <a:font script="Jpan" typeface="游ゴシック"/>
+        <a:font script="Hang" typeface="맑은 고딕"/>
+        <a:font script="Hans" typeface="等线"/>
+        <a:font script="Hant" typeface="新細明體"/>
+        <a:font script="Arab" typeface="Arial"/>
+        <a:font script="Hebr" typeface="Arial"/>
+        <a:font script="Thai" typeface="Cordia New"/>
+        <a:font script="Ethi" typeface="Nyala"/>
+        <a:font script="Beng" typeface="Vrinda"/>
+        <a:font script="Gujr" typeface="Shruti"/>
+        <a:font script="Khmr" typeface="DaunPenh"/>
+        <a:font script="Knda" typeface="Tunga"/>
+        <a:font script="Guru" typeface="Raavi"/>
+        <a:font script="Cans" typeface="Euphemia"/>
+        <a:font script="Cher" typeface="Plantagenet Cherokee"/>
+        <a:font script="Yiii" typeface="Microsoft Yi Baiti"/>
+        <a:font script="Tibt" typeface="Microsoft Himalaya"/>
+        <a:font script="Thaa" typeface="MV Boli"/>
+        <a:font script="Deva" typeface="Mangal"/>
+        <a:font script="Telu" typeface="Gautami"/>
+        <a:font script="Taml" typeface="Latha"/>
+        <a:font script="Syrc" typeface="Estrangelo Edessa"/>
+        <a:font script="Orya" typeface="Kalinga"/>
+        <a:font script="Mlym" typeface="Kartika"/>
+        <a:font script="Laoo" typeface="DokChampa"/>
+        <a:font script="Sinh" typeface="Iskoola Pota"/>
+        <a:font script="Mong" typeface="Mongolian Baiti"/>
+        <a:font script="Viet" typeface="Arial"/>
+        <a:font script="Uigh" typeface="Microsoft Uighur"/>
+        <a:font script="Geor" typeface="Sylfaen"/>
+      </a:minorFont>
+    </a:fontScheme>
+    <a:fmtScheme name="Office">
+      <a:fillStyleLst>
+        <a:solidFill>
+          <a:schemeClr val="phClr"/>
+        </a:solidFill>
+        <a:gradFill rotWithShape="1">
+          <a:gsLst>
+            <a:gs pos="0">
+              <a:schemeClr val="phClr">
+                <a:lumMod val="110000"/>
+                <a:satMod val="105000"/>
+                <a:tint val="67000"/>
+              </a:schemeClr>
+            </a:gs>
+            <a:gs pos="50000">
+              <a:schemeClr val="phClr">
+                <a:lumMod val="105000"/>
+                <a:satMod val="103000"/>
+                <a:tint val="73000"/>
+              </a:schemeClr>
+            </a:gs>
+            <a:gs pos="100000">
+              <a:schemeClr val="phClr">
+                <a:lumMod val="105000"/>
+                <a:satMod val="109000"/>
+                <a:tint val="81000"/>
+              </a:schemeClr>
+            </a:gs>
+          </a:gsLst>
+          <a:lin ang="5400000" scaled="0"/>
+        </a:gradFill>
+        <a:gradFill rotWithShape="1">
+          <a:gsLst>
+            <a:gs pos="0">
+              <a:schemeClr val="phClr">
+                <a:satMod val="103000"/>
+                <a:lumMod val="102000"/>
+                <a:tint val="94000"/>
+              </a:schemeClr>
+            </a:gs>
+            <a:gs pos="50000">
+              <a:schemeClr val="phClr">
+                <a:satMod val="110000"/>
+                <a:lumMod val="100000"/>
+                <a:shade val="100000"/>
+              </a:schemeClr>
+            </a:gs>
+            <a:gs pos="100000">
+              <a:schemeClr val="phClr">
+                <a:lumMod val="99000"/>
+                <a:satMod val="120000"/>
+                <a:shade val="78000"/>
+              </a:schemeClr>
+            </a:gs>
+          </a:gsLst>
+          <a:lin ang="5400000" scaled="0"/>
+        </a:gradFill>
+      </a:fillStyleLst>
+      <a:lnStyleLst>
+        <a:ln w="6350" cap="flat" cmpd="sng" algn="ctr">
+          <a:solidFill>
+            <a:schemeClr val="phClr"/>
+          </a:solidFill>
+          <a:prstDash val="solid"/>
+          <a:miter lim="800000"/>
+        </a:ln>
+        <a:ln w="12700" cap="flat" cmpd="sng" algn="ctr">
+          <a:solidFill>
+            <a:schemeClr val="phClr"/>
+          </a:solidFill>
+          <a:prstDash val="solid"/>
+          <a:miter lim="800000"/>
+        </a:ln>
+        <a:ln w="19050" cap="flat" cmpd="sng" algn="ctr">
+          <a:solidFill>
+            <a:schemeClr val="phClr"/>
+          </a:solidFill>
+          <a:prstDash val="solid"/>
+          <a:miter lim="800000"/>
+        </a:ln>
+      </a:lnStyleLst>
+      <a:effectStyleLst>
+        <a:effectStyle>
+          <a:effectLst/>
+        </a:effectStyle>
+        <a:effectStyle>
+          <a:effectLst/>
+        </a:effectStyle>
+        <a:effectStyle>
+          <a:effectLst>
+            <a:outerShdw blurRad="57150" dist="19050" dir="5400000" algn="ctr" rotWithShape="0">
+              <a:srgbClr val="000000">
+                <a:alpha val="63000"/>
+              </a:srgbClr>
+            </a:outerShdw>
+          </a:effectLst>
+        </a:effectStyle>
+      </a:effectStyleLst>
+      <a:bgFillStyleLst>
+        <a:solidFill>
+          <a:schemeClr val="phClr"/>
+        </a:solidFill>
+        <a:solidFill>
+          <a:schemeClr val="phClr">
+            <a:tint val="95000"/>
+            <a:satMod val="170000"/>
+          </a:schemeClr>
+        </a:solidFill>
+        <a:gradFill rotWithShape="1">
+          <a:gsLst>
+            <a:gs pos="0">
+              <a:schemeClr val="phClr">
+                <a:tint val="93000"/>
+                <a:satMod val="150000"/>
+                <a:shade val="98000"/>
+                <a:lumMod val="102000"/>
+              </a:schemeClr>
+            </a:gs>
+            <a:gs pos="50000">
+              <a:schemeClr val="phClr">
+                <a:tint val="98000"/>
+                <a:satMod val="130000"/>
+                <a:shade val="90000"/>
+                <a:lumMod val="103000"/>
+              </a:schemeClr>
+            </a:gs>
+            <a:gs pos="100000">
+              <a:schemeClr val="phClr">
+                <a:shade val="63000"/>
+                <a:satMod val="120000"/>
+              </a:schemeClr>
+            </a:gs>
+          </a:gsLst>
+          <a:lin ang="5400000" scaled="0"/>
+        </a:gradFill>
+      </a:bgFillStyleLst>
+    </a:fmtScheme>
+  </a:themeElements>
   <a:extLst>
     <a:ext uri="{05A4C25C-085E-4340-85A3-A5531E510DB2}">
       <thm15:themeFamily xmlns:thm15="http://schemas.microsoft.com/office/thememl/2012/main" name="Office Theme" id="{62F939B6-93AF-4DB8-9C6B-D6C7DFDC589F}" vid="{4A3C46E8-61CC-4603-A589-7422A47A8E4A}"/>
